--- a/ADG/_실측판/13장/13장_DataGuardBroker_개요와구성생성.pptx
+++ b/ADG/_실측판/13장/13장_DataGuardBroker_개요와구성생성.pptx
@@ -5688,7 +5688,44 @@
                 </a:solidFill>
                 <a:latin typeface="맑은 고딕"/>
               </a:rPr>
-              <a:t>•  접속조차 안 된다 → **Oracle Net 문제**. `tnsping` 부터</a:t>
+              <a:t>•  접속조차 안 된다 → </a:t>
+            </a:r>
+            <a:r>
+              <a:rPr sz="1700" b="1">
+                <a:solidFill>
+                  <a:srgbClr val="222222"/>
+                </a:solidFill>
+                <a:latin typeface="맑은 고딕"/>
+              </a:rPr>
+              <a:t>Oracle Net 문제</a:t>
+            </a:r>
+            <a:r>
+              <a:rPr sz="1700" b="0">
+                <a:solidFill>
+                  <a:srgbClr val="222222"/>
+                </a:solidFill>
+                <a:latin typeface="맑은 고딕"/>
+              </a:rPr>
+              <a:t>. </a:t>
+            </a:r>
+            <a:r>
+              <a:rPr sz="1700" b="0">
+                <a:solidFill>
+                  <a:srgbClr val="222222"/>
+                </a:solidFill>
+                <a:latin typeface="Consolas"/>
+                <a:cs typeface="Consolas"/>
+              </a:rPr>
+              <a:t>tnsping</a:t>
+            </a:r>
+            <a:r>
+              <a:rPr sz="1700" b="0">
+                <a:solidFill>
+                  <a:srgbClr val="222222"/>
+                </a:solidFill>
+                <a:latin typeface="맑은 고딕"/>
+              </a:rPr>
+              <a:t> 부터</a:t>
             </a:r>
           </a:p>
           <a:p>
@@ -5704,7 +5741,44 @@
                 </a:solidFill>
                 <a:latin typeface="맑은 고딕"/>
               </a:rPr>
-              <a:t>•  `Connected` 후 **ORA-16525** → DMON 이 없다</a:t>
+              <a:t>•  </a:t>
+            </a:r>
+            <a:r>
+              <a:rPr sz="1700" b="0">
+                <a:solidFill>
+                  <a:srgbClr val="222222"/>
+                </a:solidFill>
+                <a:latin typeface="Consolas"/>
+                <a:cs typeface="Consolas"/>
+              </a:rPr>
+              <a:t>Connected</a:t>
+            </a:r>
+            <a:r>
+              <a:rPr sz="1700" b="0">
+                <a:solidFill>
+                  <a:srgbClr val="222222"/>
+                </a:solidFill>
+                <a:latin typeface="맑은 고딕"/>
+              </a:rPr>
+              <a:t> 후 </a:t>
+            </a:r>
+            <a:r>
+              <a:rPr sz="1700" b="1">
+                <a:solidFill>
+                  <a:srgbClr val="222222"/>
+                </a:solidFill>
+                <a:latin typeface="맑은 고딕"/>
+              </a:rPr>
+              <a:t>ORA-16525</a:t>
+            </a:r>
+            <a:r>
+              <a:rPr sz="1700" b="0">
+                <a:solidFill>
+                  <a:srgbClr val="222222"/>
+                </a:solidFill>
+                <a:latin typeface="맑은 고딕"/>
+              </a:rPr>
+              <a:t> → DMON 이 없다</a:t>
             </a:r>
           </a:p>
           <a:p>
@@ -5720,7 +5794,44 @@
                 </a:solidFill>
                 <a:latin typeface="맑은 고딕"/>
               </a:rPr>
-              <a:t>•  `Connected` 후 **ORA-16532** → DMON 은 있고 구성이 없다</a:t>
+              <a:t>•  </a:t>
+            </a:r>
+            <a:r>
+              <a:rPr sz="1700" b="0">
+                <a:solidFill>
+                  <a:srgbClr val="222222"/>
+                </a:solidFill>
+                <a:latin typeface="Consolas"/>
+                <a:cs typeface="Consolas"/>
+              </a:rPr>
+              <a:t>Connected</a:t>
+            </a:r>
+            <a:r>
+              <a:rPr sz="1700" b="0">
+                <a:solidFill>
+                  <a:srgbClr val="222222"/>
+                </a:solidFill>
+                <a:latin typeface="맑은 고딕"/>
+              </a:rPr>
+              <a:t> 후 </a:t>
+            </a:r>
+            <a:r>
+              <a:rPr sz="1700" b="1">
+                <a:solidFill>
+                  <a:srgbClr val="222222"/>
+                </a:solidFill>
+                <a:latin typeface="맑은 고딕"/>
+              </a:rPr>
+              <a:t>ORA-16532</a:t>
+            </a:r>
+            <a:r>
+              <a:rPr sz="1700" b="0">
+                <a:solidFill>
+                  <a:srgbClr val="222222"/>
+                </a:solidFill>
+                <a:latin typeface="맑은 고딕"/>
+              </a:rPr>
+              <a:t> → DMON 은 있고 구성이 없다</a:t>
             </a:r>
           </a:p>
           <a:p>
@@ -5736,7 +5847,16 @@
                 </a:solidFill>
                 <a:latin typeface="맑은 고딕"/>
               </a:rPr>
-              <a:t>•  오류가 **바뀌었다면 한 단계 넘어간 것**</a:t>
+              <a:t>•  오류가 </a:t>
+            </a:r>
+            <a:r>
+              <a:rPr sz="1700" b="1">
+                <a:solidFill>
+                  <a:srgbClr val="222222"/>
+                </a:solidFill>
+                <a:latin typeface="맑은 고딕"/>
+              </a:rPr>
+              <a:t>바뀌었다면 한 단계 넘어간 것</a:t>
             </a:r>
           </a:p>
         </p:txBody>
@@ -6154,7 +6274,26 @@
                 </a:solidFill>
                 <a:latin typeface="맑은 고딕"/>
               </a:rPr>
-              <a:t>•  `ALTER SYSTEM SET dg_broker_start=TRUE SCOPE=BOTH;` — 양쪽</a:t>
+              <a:t>•  </a:t>
+            </a:r>
+            <a:r>
+              <a:rPr sz="1700" b="0">
+                <a:solidFill>
+                  <a:srgbClr val="222222"/>
+                </a:solidFill>
+                <a:latin typeface="Consolas"/>
+                <a:cs typeface="Consolas"/>
+              </a:rPr>
+              <a:t>ALTER SYSTEM SET dg_broker_start=TRUE SCOPE=BOTH;</a:t>
+            </a:r>
+            <a:r>
+              <a:rPr sz="1700" b="0">
+                <a:solidFill>
+                  <a:srgbClr val="222222"/>
+                </a:solidFill>
+                <a:latin typeface="맑은 고딕"/>
+              </a:rPr>
+              <a:t> — 양쪽</a:t>
             </a:r>
           </a:p>
           <a:p>
@@ -6170,7 +6309,55 @@
                 </a:solidFill>
                 <a:latin typeface="맑은 고딕"/>
               </a:rPr>
-              <a:t>•  `ps -ef | grep dmon` → `ora_dmon_chicago` / `ora_dmon_boston`</a:t>
+              <a:t>•  </a:t>
+            </a:r>
+            <a:r>
+              <a:rPr sz="1700" b="0">
+                <a:solidFill>
+                  <a:srgbClr val="222222"/>
+                </a:solidFill>
+                <a:latin typeface="Consolas"/>
+                <a:cs typeface="Consolas"/>
+              </a:rPr>
+              <a:t>ps -ef | grep dmon</a:t>
+            </a:r>
+            <a:r>
+              <a:rPr sz="1700" b="0">
+                <a:solidFill>
+                  <a:srgbClr val="222222"/>
+                </a:solidFill>
+                <a:latin typeface="맑은 고딕"/>
+              </a:rPr>
+              <a:t> → </a:t>
+            </a:r>
+            <a:r>
+              <a:rPr sz="1700" b="0">
+                <a:solidFill>
+                  <a:srgbClr val="222222"/>
+                </a:solidFill>
+                <a:latin typeface="Consolas"/>
+                <a:cs typeface="Consolas"/>
+              </a:rPr>
+              <a:t>ora_dmon_chicago</a:t>
+            </a:r>
+            <a:r>
+              <a:rPr sz="1700" b="0">
+                <a:solidFill>
+                  <a:srgbClr val="222222"/>
+                </a:solidFill>
+                <a:latin typeface="맑은 고딕"/>
+              </a:rPr>
+              <a:t> / </a:t>
+            </a:r>
+            <a:r>
+              <a:rPr sz="1700" b="0">
+                <a:solidFill>
+                  <a:srgbClr val="222222"/>
+                </a:solidFill>
+                <a:latin typeface="Consolas"/>
+                <a:cs typeface="Consolas"/>
+              </a:rPr>
+              <a:t>ora_dmon_boston</a:t>
             </a:r>
           </a:p>
           <a:p>
@@ -6186,7 +6373,55 @@
                 </a:solidFill>
                 <a:latin typeface="맑은 고딕"/>
               </a:rPr>
-              <a:t>•  `V$PROCESS` 의 `PNAME` = `DMON`</a:t>
+              <a:t>•  </a:t>
+            </a:r>
+            <a:r>
+              <a:rPr sz="1700" b="0">
+                <a:solidFill>
+                  <a:srgbClr val="222222"/>
+                </a:solidFill>
+                <a:latin typeface="Consolas"/>
+                <a:cs typeface="Consolas"/>
+              </a:rPr>
+              <a:t>V$PROCESS</a:t>
+            </a:r>
+            <a:r>
+              <a:rPr sz="1700" b="0">
+                <a:solidFill>
+                  <a:srgbClr val="222222"/>
+                </a:solidFill>
+                <a:latin typeface="맑은 고딕"/>
+              </a:rPr>
+              <a:t> 의 </a:t>
+            </a:r>
+            <a:r>
+              <a:rPr sz="1700" b="0">
+                <a:solidFill>
+                  <a:srgbClr val="222222"/>
+                </a:solidFill>
+                <a:latin typeface="Consolas"/>
+                <a:cs typeface="Consolas"/>
+              </a:rPr>
+              <a:t>PNAME</a:t>
+            </a:r>
+            <a:r>
+              <a:rPr sz="1700" b="0">
+                <a:solidFill>
+                  <a:srgbClr val="222222"/>
+                </a:solidFill>
+                <a:latin typeface="맑은 고딕"/>
+              </a:rPr>
+              <a:t> = </a:t>
+            </a:r>
+            <a:r>
+              <a:rPr sz="1700" b="0">
+                <a:solidFill>
+                  <a:srgbClr val="222222"/>
+                </a:solidFill>
+                <a:latin typeface="Consolas"/>
+                <a:cs typeface="Consolas"/>
+              </a:rPr>
+              <a:t>DMON</a:t>
             </a:r>
           </a:p>
           <a:p>
@@ -6202,7 +6437,26 @@
                 </a:solidFill>
                 <a:latin typeface="맑은 고딕"/>
               </a:rPr>
-              <a:t>•  구성이 활성화되면 통신용 **`NSV2`** 도 뜬다</a:t>
+              <a:t>•  구성이 활성화되면 통신용 </a:t>
+            </a:r>
+            <a:r>
+              <a:rPr sz="1700" b="1">
+                <a:solidFill>
+                  <a:srgbClr val="222222"/>
+                </a:solidFill>
+                <a:latin typeface="Consolas"/>
+                <a:cs typeface="Consolas"/>
+              </a:rPr>
+              <a:t>NSV2</a:t>
+            </a:r>
+            <a:r>
+              <a:rPr sz="1700" b="0">
+                <a:solidFill>
+                  <a:srgbClr val="222222"/>
+                </a:solidFill>
+                <a:latin typeface="맑은 고딕"/>
+              </a:rPr>
+              <a:t> 도 뜬다</a:t>
             </a:r>
           </a:p>
         </p:txBody>
@@ -6381,7 +6635,36 @@
                 </a:solidFill>
                 <a:latin typeface="맑은 고딕"/>
               </a:rPr>
-              <a:t>•  파라미터가 바뀌지 않았다 — `fal_server` 는 여전히 `boston`</a:t>
+              <a:t>•  파라미터가 바뀌지 않았다 — </a:t>
+            </a:r>
+            <a:r>
+              <a:rPr sz="1700" b="0">
+                <a:solidFill>
+                  <a:srgbClr val="222222"/>
+                </a:solidFill>
+                <a:latin typeface="Consolas"/>
+                <a:cs typeface="Consolas"/>
+              </a:rPr>
+              <a:t>fal_server</a:t>
+            </a:r>
+            <a:r>
+              <a:rPr sz="1700" b="0">
+                <a:solidFill>
+                  <a:srgbClr val="222222"/>
+                </a:solidFill>
+                <a:latin typeface="맑은 고딕"/>
+              </a:rPr>
+              <a:t> 는 여전히 </a:t>
+            </a:r>
+            <a:r>
+              <a:rPr sz="1700" b="0">
+                <a:solidFill>
+                  <a:srgbClr val="222222"/>
+                </a:solidFill>
+                <a:latin typeface="Consolas"/>
+                <a:cs typeface="Consolas"/>
+              </a:rPr>
+              <a:t>boston</a:t>
             </a:r>
           </a:p>
           <a:p>
@@ -6397,7 +6680,17 @@
                 </a:solidFill>
                 <a:latin typeface="맑은 고딕"/>
               </a:rPr>
-              <a:t>•  복제도 그대로 — `MANAGED REAL TIME APPLY`</a:t>
+              <a:t>•  복제도 그대로 — </a:t>
+            </a:r>
+            <a:r>
+              <a:rPr sz="1700" b="0">
+                <a:solidFill>
+                  <a:srgbClr val="222222"/>
+                </a:solidFill>
+                <a:latin typeface="Consolas"/>
+                <a:cs typeface="Consolas"/>
+              </a:rPr>
+              <a:t>MANAGED REAL TIME APPLY</a:t>
             </a:r>
           </a:p>
           <a:p>
@@ -6413,7 +6706,16 @@
                 </a:solidFill>
                 <a:latin typeface="맑은 고딕"/>
               </a:rPr>
-              <a:t>•  **Broker 를 켜는 것 자체는 서비스에 영향이 없다**</a:t>
+              <a:t>•  </a:t>
+            </a:r>
+            <a:r>
+              <a:rPr sz="1700" b="1">
+                <a:solidFill>
+                  <a:srgbClr val="222222"/>
+                </a:solidFill>
+                <a:latin typeface="맑은 고딕"/>
+              </a:rPr>
+              <a:t>Broker 를 켜는 것 자체는 서비스에 영향이 없다</a:t>
             </a:r>
           </a:p>
           <a:p>
@@ -6847,7 +7149,26 @@
                 </a:solidFill>
                 <a:latin typeface="맑은 고딕"/>
               </a:rPr>
-              <a:t>•  `'dg_chicago'` — 구성의 이름. 아무거나</a:t>
+              <a:t>•  </a:t>
+            </a:r>
+            <a:r>
+              <a:rPr sz="1700" b="0">
+                <a:solidFill>
+                  <a:srgbClr val="222222"/>
+                </a:solidFill>
+                <a:latin typeface="Consolas"/>
+                <a:cs typeface="Consolas"/>
+              </a:rPr>
+              <a:t>'dg_chicago'</a:t>
+            </a:r>
+            <a:r>
+              <a:rPr sz="1700" b="0">
+                <a:solidFill>
+                  <a:srgbClr val="222222"/>
+                </a:solidFill>
+                <a:latin typeface="맑은 고딕"/>
+              </a:rPr>
+              <a:t> — 구성의 이름. 아무거나</a:t>
             </a:r>
           </a:p>
           <a:p>
@@ -6863,7 +7184,35 @@
                 </a:solidFill>
                 <a:latin typeface="맑은 고딕"/>
               </a:rPr>
-              <a:t>•  `primary database is 'chicago'` — **DB_UNIQUE_NAME**</a:t>
+              <a:t>•  </a:t>
+            </a:r>
+            <a:r>
+              <a:rPr sz="1700" b="0">
+                <a:solidFill>
+                  <a:srgbClr val="222222"/>
+                </a:solidFill>
+                <a:latin typeface="Consolas"/>
+                <a:cs typeface="Consolas"/>
+              </a:rPr>
+              <a:t>primary database is 'chicago'</a:t>
+            </a:r>
+            <a:r>
+              <a:rPr sz="1700" b="0">
+                <a:solidFill>
+                  <a:srgbClr val="222222"/>
+                </a:solidFill>
+                <a:latin typeface="맑은 고딕"/>
+              </a:rPr>
+              <a:t> — </a:t>
+            </a:r>
+            <a:r>
+              <a:rPr sz="1700" b="1">
+                <a:solidFill>
+                  <a:srgbClr val="222222"/>
+                </a:solidFill>
+                <a:latin typeface="맑은 고딕"/>
+              </a:rPr>
+              <a:t>DB_UNIQUE_NAME</a:t>
             </a:r>
           </a:p>
           <a:p>
@@ -6879,7 +7228,35 @@
                 </a:solidFill>
                 <a:latin typeface="맑은 고딕"/>
               </a:rPr>
-              <a:t>•  `connect identifier is chicago` — **tnsnames 별칭**</a:t>
+              <a:t>•  </a:t>
+            </a:r>
+            <a:r>
+              <a:rPr sz="1700" b="0">
+                <a:solidFill>
+                  <a:srgbClr val="222222"/>
+                </a:solidFill>
+                <a:latin typeface="Consolas"/>
+                <a:cs typeface="Consolas"/>
+              </a:rPr>
+              <a:t>connect identifier is chicago</a:t>
+            </a:r>
+            <a:r>
+              <a:rPr sz="1700" b="0">
+                <a:solidFill>
+                  <a:srgbClr val="222222"/>
+                </a:solidFill>
+                <a:latin typeface="맑은 고딕"/>
+              </a:rPr>
+              <a:t> — </a:t>
+            </a:r>
+            <a:r>
+              <a:rPr sz="1700" b="1">
+                <a:solidFill>
+                  <a:srgbClr val="222222"/>
+                </a:solidFill>
+                <a:latin typeface="맑은 고딕"/>
+              </a:rPr>
+              <a:t>tnsnames 별칭</a:t>
             </a:r>
           </a:p>
           <a:p>
@@ -6895,7 +7272,17 @@
                 </a:solidFill>
                 <a:latin typeface="맑은 고딕"/>
               </a:rPr>
-              <a:t>•  만든 직후 `Configuration Status: DISABLED`</a:t>
+              <a:t>•  만든 직후 </a:t>
+            </a:r>
+            <a:r>
+              <a:rPr sz="1700" b="0">
+                <a:solidFill>
+                  <a:srgbClr val="222222"/>
+                </a:solidFill>
+                <a:latin typeface="Consolas"/>
+                <a:cs typeface="Consolas"/>
+              </a:rPr>
+              <a:t>Configuration Status: DISABLED</a:t>
             </a:r>
           </a:p>
         </p:txBody>
@@ -7074,7 +7461,36 @@
                 </a:solidFill>
                 <a:latin typeface="맑은 고딕"/>
               </a:rPr>
-              <a:t>•  `ADD DATABASE 'boston'` → **`member has a LOG_ARCHIVE_DEST_n parameter with SERVICE attribute set`**</a:t>
+              <a:t>•  </a:t>
+            </a:r>
+            <a:r>
+              <a:rPr sz="1700" b="0">
+                <a:solidFill>
+                  <a:srgbClr val="222222"/>
+                </a:solidFill>
+                <a:latin typeface="Consolas"/>
+                <a:cs typeface="Consolas"/>
+              </a:rPr>
+              <a:t>ADD DATABASE 'boston'</a:t>
+            </a:r>
+            <a:r>
+              <a:rPr sz="1700" b="0">
+                <a:solidFill>
+                  <a:srgbClr val="222222"/>
+                </a:solidFill>
+                <a:latin typeface="맑은 고딕"/>
+              </a:rPr>
+              <a:t> → </a:t>
+            </a:r>
+            <a:r>
+              <a:rPr sz="1700" b="1">
+                <a:solidFill>
+                  <a:srgbClr val="222222"/>
+                </a:solidFill>
+                <a:latin typeface="Consolas"/>
+                <a:cs typeface="Consolas"/>
+              </a:rPr>
+              <a:t>member has a LOG_ARCHIVE_DEST_n parameter with SERVICE attribute set</a:t>
             </a:r>
           </a:p>
           <a:p>
@@ -7090,7 +7506,26 @@
                 </a:solidFill>
                 <a:latin typeface="맑은 고딕"/>
               </a:rPr>
-              <a:t>•  boston 의 `log_archive_dest_2` 는 5장 DUPLICATE 가 설정한 것</a:t>
+              <a:t>•  boston 의 </a:t>
+            </a:r>
+            <a:r>
+              <a:rPr sz="1700" b="0">
+                <a:solidFill>
+                  <a:srgbClr val="222222"/>
+                </a:solidFill>
+                <a:latin typeface="Consolas"/>
+                <a:cs typeface="Consolas"/>
+              </a:rPr>
+              <a:t>log_archive_dest_2</a:t>
+            </a:r>
+            <a:r>
+              <a:rPr sz="1700" b="0">
+                <a:solidFill>
+                  <a:srgbClr val="222222"/>
+                </a:solidFill>
+                <a:latin typeface="맑은 고딕"/>
+              </a:rPr>
+              <a:t> 는 5장 DUPLICATE 가 설정한 것</a:t>
             </a:r>
           </a:p>
           <a:p>
@@ -7106,7 +7541,25 @@
                 </a:solidFill>
                 <a:latin typeface="맑은 고딕"/>
               </a:rPr>
-              <a:t>•  **잘못된 값이 아니다.** Broker 가 그 자리를 요구할 뿐</a:t>
+              <a:t>•  </a:t>
+            </a:r>
+            <a:r>
+              <a:rPr sz="1700" b="1">
+                <a:solidFill>
+                  <a:srgbClr val="222222"/>
+                </a:solidFill>
+                <a:latin typeface="맑은 고딕"/>
+              </a:rPr>
+              <a:t>잘못된 값이 아니다.</a:t>
+            </a:r>
+            <a:r>
+              <a:rPr sz="1700" b="0">
+                <a:solidFill>
+                  <a:srgbClr val="222222"/>
+                </a:solidFill>
+                <a:latin typeface="맑은 고딕"/>
+              </a:rPr>
+              <a:t> Broker 가 그 자리를 요구할 뿐</a:t>
             </a:r>
           </a:p>
           <a:p>
@@ -7122,7 +7575,16 @@
                 </a:solidFill>
                 <a:latin typeface="맑은 고딕"/>
               </a:rPr>
-              <a:t>•  원칙 — **"내가 관리하는 것은 내가 만든다"**</a:t>
+              <a:t>•  원칙 — </a:t>
+            </a:r>
+            <a:r>
+              <a:rPr sz="1700" b="1">
+                <a:solidFill>
+                  <a:srgbClr val="222222"/>
+                </a:solidFill>
+                <a:latin typeface="맑은 고딕"/>
+              </a:rPr>
+              <a:t>"내가 관리하는 것은 내가 만든다"</a:t>
             </a:r>
           </a:p>
         </p:txBody>
@@ -7301,7 +7763,35 @@
                 </a:solidFill>
                 <a:latin typeface="맑은 고딕"/>
               </a:rPr>
-              <a:t>•  `ALTER SYSTEM SET log_archive_dest_2='' SCOPE=BOTH;` — **양쪽 모두**</a:t>
+              <a:t>•  </a:t>
+            </a:r>
+            <a:r>
+              <a:rPr sz="1700" b="0">
+                <a:solidFill>
+                  <a:srgbClr val="222222"/>
+                </a:solidFill>
+                <a:latin typeface="Consolas"/>
+                <a:cs typeface="Consolas"/>
+              </a:rPr>
+              <a:t>ALTER SYSTEM SET log_archive_dest_2='' SCOPE=BOTH;</a:t>
+            </a:r>
+            <a:r>
+              <a:rPr sz="1700" b="0">
+                <a:solidFill>
+                  <a:srgbClr val="222222"/>
+                </a:solidFill>
+                <a:latin typeface="맑은 고딕"/>
+              </a:rPr>
+              <a:t> — </a:t>
+            </a:r>
+            <a:r>
+              <a:rPr sz="1700" b="1">
+                <a:solidFill>
+                  <a:srgbClr val="222222"/>
+                </a:solidFill>
+                <a:latin typeface="맑은 고딕"/>
+              </a:rPr>
+              <a:t>양쪽 모두</a:t>
             </a:r>
           </a:p>
           <a:p>
@@ -7317,7 +7807,26 @@
                 </a:solidFill>
                 <a:latin typeface="맑은 고딕"/>
               </a:rPr>
-              <a:t>•  1번(로컬 아카이브)은 `SERVICE` 속성이 없으므로 그대로</a:t>
+              <a:t>•  1번(로컬 아카이브)은 </a:t>
+            </a:r>
+            <a:r>
+              <a:rPr sz="1700" b="0">
+                <a:solidFill>
+                  <a:srgbClr val="222222"/>
+                </a:solidFill>
+                <a:latin typeface="Consolas"/>
+                <a:cs typeface="Consolas"/>
+              </a:rPr>
+              <a:t>SERVICE</a:t>
+            </a:r>
+            <a:r>
+              <a:rPr sz="1700" b="0">
+                <a:solidFill>
+                  <a:srgbClr val="222222"/>
+                </a:solidFill>
+                <a:latin typeface="맑은 고딕"/>
+              </a:rPr>
+              <a:t> 속성이 없으므로 그대로</a:t>
             </a:r>
           </a:p>
           <a:p>
@@ -7333,7 +7842,25 @@
                 </a:solidFill>
                 <a:latin typeface="맑은 고딕"/>
               </a:rPr>
-              <a:t>•  **이 순간 전송이 끊긴다** — 이 장의 유일한 서비스 영향 구간</a:t>
+              <a:t>•  </a:t>
+            </a:r>
+            <a:r>
+              <a:rPr sz="1700" b="1">
+                <a:solidFill>
+                  <a:srgbClr val="222222"/>
+                </a:solidFill>
+                <a:latin typeface="맑은 고딕"/>
+              </a:rPr>
+              <a:t>이 순간 전송이 끊긴다</a:t>
+            </a:r>
+            <a:r>
+              <a:rPr sz="1700" b="0">
+                <a:solidFill>
+                  <a:srgbClr val="222222"/>
+                </a:solidFill>
+                <a:latin typeface="맑은 고딕"/>
+              </a:rPr>
+              <a:t> — 이 장의 유일한 서비스 영향 구간</a:t>
             </a:r>
           </a:p>
           <a:p>
@@ -7528,7 +8055,27 @@
                 </a:solidFill>
                 <a:latin typeface="맑은 고딕"/>
               </a:rPr>
-              <a:t>•  `boston - Physical standby database **(disabled)**`</a:t>
+              <a:t>•  </a:t>
+            </a:r>
+            <a:r>
+              <a:rPr sz="1700" b="0">
+                <a:solidFill>
+                  <a:srgbClr val="222222"/>
+                </a:solidFill>
+                <a:latin typeface="Consolas"/>
+                <a:cs typeface="Consolas"/>
+              </a:rPr>
+              <a:t>boston - Physical standby database </a:t>
+            </a:r>
+            <a:r>
+              <a:rPr sz="1700" b="1">
+                <a:solidFill>
+                  <a:srgbClr val="222222"/>
+                </a:solidFill>
+                <a:latin typeface="Consolas"/>
+                <a:cs typeface="Consolas"/>
+              </a:rPr>
+              <a:t>(disabled)</a:t>
             </a:r>
           </a:p>
           <a:p>
@@ -7544,7 +8091,17 @@
                 </a:solidFill>
                 <a:latin typeface="맑은 고딕"/>
               </a:rPr>
-              <a:t>•  `ORA-16905: The member was not enabled yet.`</a:t>
+              <a:t>•  </a:t>
+            </a:r>
+            <a:r>
+              <a:rPr sz="1700" b="0">
+                <a:solidFill>
+                  <a:srgbClr val="222222"/>
+                </a:solidFill>
+                <a:latin typeface="Consolas"/>
+                <a:cs typeface="Consolas"/>
+              </a:rPr>
+              <a:t>ORA-16905: The member was not enabled yet.</a:t>
             </a:r>
           </a:p>
           <a:p>
@@ -7560,7 +8117,17 @@
                 </a:solidFill>
                 <a:latin typeface="맑은 고딕"/>
               </a:rPr>
-              <a:t>•  그런데 `Configuration Status: SUCCESS`</a:t>
+              <a:t>•  그런데 </a:t>
+            </a:r>
+            <a:r>
+              <a:rPr sz="1700" b="0">
+                <a:solidFill>
+                  <a:srgbClr val="222222"/>
+                </a:solidFill>
+                <a:latin typeface="Consolas"/>
+                <a:cs typeface="Consolas"/>
+              </a:rPr>
+              <a:t>Configuration Status: SUCCESS</a:t>
             </a:r>
           </a:p>
           <a:p>
@@ -7576,7 +8143,16 @@
                 </a:solidFill>
                 <a:latin typeface="맑은 고딕"/>
               </a:rPr>
-              <a:t>•  **구성 상태와 멤버 상태가 따로 판정된다**</a:t>
+              <a:t>•  </a:t>
+            </a:r>
+            <a:r>
+              <a:rPr sz="1700" b="1">
+                <a:solidFill>
+                  <a:srgbClr val="222222"/>
+                </a:solidFill>
+                <a:latin typeface="맑은 고딕"/>
+              </a:rPr>
+              <a:t>구성 상태와 멤버 상태가 따로 판정된다</a:t>
             </a:r>
           </a:p>
           <a:p>
@@ -7592,7 +8168,25 @@
                 </a:solidFill>
                 <a:latin typeface="맑은 고딕"/>
               </a:rPr>
-              <a:t>•  들여쓰기가 **리두 경로**를 나타낸다</a:t>
+              <a:t>•  들여쓰기가 </a:t>
+            </a:r>
+            <a:r>
+              <a:rPr sz="1700" b="1">
+                <a:solidFill>
+                  <a:srgbClr val="222222"/>
+                </a:solidFill>
+                <a:latin typeface="맑은 고딕"/>
+              </a:rPr>
+              <a:t>리두 경로</a:t>
+            </a:r>
+            <a:r>
+              <a:rPr sz="1700" b="0">
+                <a:solidFill>
+                  <a:srgbClr val="222222"/>
+                </a:solidFill>
+                <a:latin typeface="맑은 고딕"/>
+              </a:rPr>
+              <a:t>를 나타낸다</a:t>
             </a:r>
           </a:p>
         </p:txBody>
@@ -7987,7 +8581,26 @@
                 </a:solidFill>
                 <a:latin typeface="맑은 고딕"/>
               </a:rPr>
-              <a:t>•  전제 조건을 확인하고 `DG_BROKER_START` 를 켠다.</a:t>
+              <a:t>•  전제 조건을 확인하고 </a:t>
+            </a:r>
+            <a:r>
+              <a:rPr sz="1600" b="0">
+                <a:solidFill>
+                  <a:srgbClr val="222222"/>
+                </a:solidFill>
+                <a:latin typeface="Consolas"/>
+                <a:cs typeface="Consolas"/>
+              </a:rPr>
+              <a:t>DG_BROKER_START</a:t>
+            </a:r>
+            <a:r>
+              <a:rPr sz="1600" b="0">
+                <a:solidFill>
+                  <a:srgbClr val="222222"/>
+                </a:solidFill>
+                <a:latin typeface="맑은 고딕"/>
+              </a:rPr>
+              <a:t> 를 켠다.</a:t>
             </a:r>
           </a:p>
           <a:p>
@@ -8003,7 +8616,64 @@
                 </a:solidFill>
                 <a:latin typeface="맑은 고딕"/>
               </a:rPr>
-              <a:t>•  `CREATE` · `ADD` · `ENABLE` 로 구성을 만든다.</a:t>
+              <a:t>•  </a:t>
+            </a:r>
+            <a:r>
+              <a:rPr sz="1600" b="0">
+                <a:solidFill>
+                  <a:srgbClr val="222222"/>
+                </a:solidFill>
+                <a:latin typeface="Consolas"/>
+                <a:cs typeface="Consolas"/>
+              </a:rPr>
+              <a:t>CREATE</a:t>
+            </a:r>
+            <a:r>
+              <a:rPr sz="1600" b="0">
+                <a:solidFill>
+                  <a:srgbClr val="222222"/>
+                </a:solidFill>
+                <a:latin typeface="맑은 고딕"/>
+              </a:rPr>
+              <a:t> · </a:t>
+            </a:r>
+            <a:r>
+              <a:rPr sz="1600" b="0">
+                <a:solidFill>
+                  <a:srgbClr val="222222"/>
+                </a:solidFill>
+                <a:latin typeface="Consolas"/>
+                <a:cs typeface="Consolas"/>
+              </a:rPr>
+              <a:t>ADD</a:t>
+            </a:r>
+            <a:r>
+              <a:rPr sz="1600" b="0">
+                <a:solidFill>
+                  <a:srgbClr val="222222"/>
+                </a:solidFill>
+                <a:latin typeface="맑은 고딕"/>
+              </a:rPr>
+              <a:t> · </a:t>
+            </a:r>
+            <a:r>
+              <a:rPr sz="1600" b="0">
+                <a:solidFill>
+                  <a:srgbClr val="222222"/>
+                </a:solidFill>
+                <a:latin typeface="Consolas"/>
+                <a:cs typeface="Consolas"/>
+              </a:rPr>
+              <a:t>ENABLE</a:t>
+            </a:r>
+            <a:r>
+              <a:rPr sz="1600" b="0">
+                <a:solidFill>
+                  <a:srgbClr val="222222"/>
+                </a:solidFill>
+                <a:latin typeface="맑은 고딕"/>
+              </a:rPr>
+              <a:t> 로 구성을 만든다.</a:t>
             </a:r>
           </a:p>
           <a:p>
@@ -8051,7 +8721,45 @@
                 </a:solidFill>
                 <a:latin typeface="맑은 고딕"/>
               </a:rPr>
-              <a:t>•  `SHOW` · `EDIT` 로 상태와 속성을 다룬다.</a:t>
+              <a:t>•  </a:t>
+            </a:r>
+            <a:r>
+              <a:rPr sz="1600" b="0">
+                <a:solidFill>
+                  <a:srgbClr val="222222"/>
+                </a:solidFill>
+                <a:latin typeface="Consolas"/>
+                <a:cs typeface="Consolas"/>
+              </a:rPr>
+              <a:t>SHOW</a:t>
+            </a:r>
+            <a:r>
+              <a:rPr sz="1600" b="0">
+                <a:solidFill>
+                  <a:srgbClr val="222222"/>
+                </a:solidFill>
+                <a:latin typeface="맑은 고딕"/>
+              </a:rPr>
+              <a:t> · </a:t>
+            </a:r>
+            <a:r>
+              <a:rPr sz="1600" b="0">
+                <a:solidFill>
+                  <a:srgbClr val="222222"/>
+                </a:solidFill>
+                <a:latin typeface="Consolas"/>
+                <a:cs typeface="Consolas"/>
+              </a:rPr>
+              <a:t>EDIT</a:t>
+            </a:r>
+            <a:r>
+              <a:rPr sz="1600" b="0">
+                <a:solidFill>
+                  <a:srgbClr val="222222"/>
+                </a:solidFill>
+                <a:latin typeface="맑은 고딕"/>
+              </a:rPr>
+              <a:t> 로 상태와 속성을 다룬다.</a:t>
             </a:r>
           </a:p>
           <a:p>
@@ -8246,7 +8954,17 @@
                 </a:solidFill>
                 <a:latin typeface="맑은 고딕"/>
               </a:rPr>
-              <a:t>•  사람 — `service=boston async noaffirm valid_for=(online_logfiles,primary_role) ...`</a:t>
+              <a:t>•  사람 — </a:t>
+            </a:r>
+            <a:r>
+              <a:rPr sz="1700" b="0">
+                <a:solidFill>
+                  <a:srgbClr val="222222"/>
+                </a:solidFill>
+                <a:latin typeface="Consolas"/>
+                <a:cs typeface="Consolas"/>
+              </a:rPr>
+              <a:t>service=boston async noaffirm valid_for=(online_logfiles,primary_role) ...</a:t>
             </a:r>
           </a:p>
           <a:p>
@@ -8262,7 +8980,17 @@
                 </a:solidFill>
                 <a:latin typeface="맑은 고딕"/>
               </a:rPr>
-              <a:t>•  Broker — `service="boston", ASYNC NOAFFIRM delay=0 optional compression=disable max_failure=0 reopen=300 db_unique_name="boston" net_timeout=30, valid_for=(online_logfile,all_roles)`</a:t>
+              <a:t>•  Broker — </a:t>
+            </a:r>
+            <a:r>
+              <a:rPr sz="1700" b="0">
+                <a:solidFill>
+                  <a:srgbClr val="222222"/>
+                </a:solidFill>
+                <a:latin typeface="Consolas"/>
+                <a:cs typeface="Consolas"/>
+              </a:rPr>
+              <a:t>service="boston", ASYNC NOAFFIRM delay=0 optional compression=disable max_failure=0 reopen=300 db_unique_name="boston" net_timeout=30, valid_for=(online_logfile,all_roles)</a:t>
             </a:r>
           </a:p>
           <a:p>
@@ -8278,7 +9006,16 @@
                 </a:solidFill>
                 <a:latin typeface="맑은 고딕"/>
               </a:rPr>
-              <a:t>•  기본값까지 전부 적는 이유 — **속성으로 바꿀 자리를 만들기 위해**</a:t>
+              <a:t>•  기본값까지 전부 적는 이유 — </a:t>
+            </a:r>
+            <a:r>
+              <a:rPr sz="1700" b="1">
+                <a:solidFill>
+                  <a:srgbClr val="222222"/>
+                </a:solidFill>
+                <a:latin typeface="맑은 고딕"/>
+              </a:rPr>
+              <a:t>속성으로 바꿀 자리를 만들기 위해</a:t>
             </a:r>
           </a:p>
         </p:txBody>
@@ -8457,7 +9194,35 @@
                 </a:solidFill>
                 <a:latin typeface="맑은 고딕"/>
               </a:rPr>
-              <a:t>•  **`FAL_SERVER` 를 비운다** — 구성 정보로 대체. 기능이 없어진 것이 아니다</a:t>
+              <a:t>•  </a:t>
+            </a:r>
+            <a:r>
+              <a:rPr sz="1700" b="1">
+                <a:solidFill>
+                  <a:srgbClr val="222222"/>
+                </a:solidFill>
+                <a:latin typeface="Consolas"/>
+                <a:cs typeface="Consolas"/>
+              </a:rPr>
+              <a:t>FAL_SERVER</a:t>
+            </a:r>
+            <a:r>
+              <a:rPr sz="1700" b="1">
+                <a:solidFill>
+                  <a:srgbClr val="222222"/>
+                </a:solidFill>
+                <a:latin typeface="맑은 고딕"/>
+              </a:rPr>
+              <a:t> 를 비운다</a:t>
+            </a:r>
+            <a:r>
+              <a:rPr sz="1700" b="0">
+                <a:solidFill>
+                  <a:srgbClr val="222222"/>
+                </a:solidFill>
+                <a:latin typeface="맑은 고딕"/>
+              </a:rPr>
+              <a:t> — 구성 정보로 대체. 기능이 없어진 것이 아니다</a:t>
             </a:r>
           </a:p>
           <a:p>
@@ -8473,7 +9238,64 @@
                 </a:solidFill>
                 <a:latin typeface="맑은 고딕"/>
               </a:rPr>
-              <a:t>•  **`VALID_FOR` 가 `all_roles`** — `primary_role` 이 아니다</a:t>
+              <a:t>•  </a:t>
+            </a:r>
+            <a:r>
+              <a:rPr sz="1700" b="1">
+                <a:solidFill>
+                  <a:srgbClr val="222222"/>
+                </a:solidFill>
+                <a:latin typeface="Consolas"/>
+                <a:cs typeface="Consolas"/>
+              </a:rPr>
+              <a:t>VALID_FOR</a:t>
+            </a:r>
+            <a:r>
+              <a:rPr sz="1700" b="1">
+                <a:solidFill>
+                  <a:srgbClr val="222222"/>
+                </a:solidFill>
+                <a:latin typeface="맑은 고딕"/>
+              </a:rPr>
+              <a:t> 가 </a:t>
+            </a:r>
+            <a:r>
+              <a:rPr sz="1700" b="1">
+                <a:solidFill>
+                  <a:srgbClr val="222222"/>
+                </a:solidFill>
+                <a:latin typeface="Consolas"/>
+                <a:cs typeface="Consolas"/>
+              </a:rPr>
+              <a:t>all_roles</a:t>
+            </a:r>
+            <a:r>
+              <a:rPr sz="1700" b="0">
+                <a:solidFill>
+                  <a:srgbClr val="222222"/>
+                </a:solidFill>
+                <a:latin typeface="맑은 고딕"/>
+              </a:rPr>
+              <a:t> — </a:t>
+            </a:r>
+            <a:r>
+              <a:rPr sz="1700" b="0">
+                <a:solidFill>
+                  <a:srgbClr val="222222"/>
+                </a:solidFill>
+                <a:latin typeface="Consolas"/>
+                <a:cs typeface="Consolas"/>
+              </a:rPr>
+              <a:t>primary_role</a:t>
+            </a:r>
+            <a:r>
+              <a:rPr sz="1700" b="0">
+                <a:solidFill>
+                  <a:srgbClr val="222222"/>
+                </a:solidFill>
+                <a:latin typeface="맑은 고딕"/>
+              </a:rPr>
+              <a:t> 이 아니다</a:t>
             </a:r>
           </a:p>
           <a:p>
@@ -8684,7 +9506,63 @@
                 </a:solidFill>
                 <a:latin typeface="맑은 고딕"/>
               </a:rPr>
-              <a:t>•  `dr1&lt;이름&gt;.dat` / `dr2&lt;이름&gt;.dat` — **양쪽 노드에** 8KB</a:t>
+              <a:t>•  </a:t>
+            </a:r>
+            <a:r>
+              <a:rPr sz="1700" b="0">
+                <a:solidFill>
+                  <a:srgbClr val="222222"/>
+                </a:solidFill>
+                <a:latin typeface="Consolas"/>
+                <a:cs typeface="Consolas"/>
+              </a:rPr>
+              <a:t>dr1&lt;이름&gt;.dat</a:t>
+            </a:r>
+            <a:r>
+              <a:rPr sz="1700" b="0">
+                <a:solidFill>
+                  <a:srgbClr val="222222"/>
+                </a:solidFill>
+                <a:latin typeface="맑은 고딕"/>
+              </a:rPr>
+              <a:t> / </a:t>
+            </a:r>
+            <a:r>
+              <a:rPr sz="1700" b="0">
+                <a:solidFill>
+                  <a:srgbClr val="222222"/>
+                </a:solidFill>
+                <a:latin typeface="Consolas"/>
+                <a:cs typeface="Consolas"/>
+              </a:rPr>
+              <a:t>dr2&lt;이름&gt;.dat</a:t>
+            </a:r>
+            <a:r>
+              <a:rPr sz="1700" b="0">
+                <a:solidFill>
+                  <a:srgbClr val="222222"/>
+                </a:solidFill>
+                <a:latin typeface="맑은 고딕"/>
+              </a:rPr>
+              <a:t> — </a:t>
+            </a:r>
+            <a:r>
+              <a:rPr sz="1700" b="1">
+                <a:solidFill>
+                  <a:srgbClr val="222222"/>
+                </a:solidFill>
+                <a:latin typeface="맑은 고딕"/>
+              </a:rPr>
+              <a:t>양쪽 노드에</a:t>
+            </a:r>
+            <a:r>
+              <a:rPr sz="1700" b="0">
+                <a:solidFill>
+                  <a:srgbClr val="222222"/>
+                </a:solidFill>
+                <a:latin typeface="맑은 고딕"/>
+              </a:rPr>
+              <a:t> 8KB</a:t>
             </a:r>
           </a:p>
           <a:p>
@@ -8716,7 +9594,26 @@
                 </a:solidFill>
                 <a:latin typeface="맑은 고딕"/>
               </a:rPr>
-              <a:t>•  `drc&lt;이름&gt;.log` — Broker 전용 로그</a:t>
+              <a:t>•  </a:t>
+            </a:r>
+            <a:r>
+              <a:rPr sz="1700" b="0">
+                <a:solidFill>
+                  <a:srgbClr val="222222"/>
+                </a:solidFill>
+                <a:latin typeface="Consolas"/>
+                <a:cs typeface="Consolas"/>
+              </a:rPr>
+              <a:t>drc&lt;이름&gt;.log</a:t>
+            </a:r>
+            <a:r>
+              <a:rPr sz="1700" b="0">
+                <a:solidFill>
+                  <a:srgbClr val="222222"/>
+                </a:solidFill>
+                <a:latin typeface="맑은 고딕"/>
+              </a:rPr>
+              <a:t> — Broker 전용 로그</a:t>
             </a:r>
           </a:p>
           <a:p>
@@ -8732,7 +9629,17 @@
                 </a:solidFill>
                 <a:latin typeface="맑은 고딕"/>
               </a:rPr>
-              <a:t>•  로그에 `DMON: Executing SQL [ALTER SYSTEM REGISTER]`</a:t>
+              <a:t>•  로그에 </a:t>
+            </a:r>
+            <a:r>
+              <a:rPr sz="1700" b="0">
+                <a:solidFill>
+                  <a:srgbClr val="222222"/>
+                </a:solidFill>
+                <a:latin typeface="Consolas"/>
+                <a:cs typeface="Consolas"/>
+              </a:rPr>
+              <a:t>DMON: Executing SQL [ALTER SYSTEM REGISTER]</a:t>
             </a:r>
           </a:p>
         </p:txBody>
@@ -9150,7 +10057,26 @@
                 </a:solidFill>
                 <a:latin typeface="맑은 고딕"/>
               </a:rPr>
-              <a:t>•  `Protection Mode` — 2장의 보호 모드</a:t>
+              <a:t>•  </a:t>
+            </a:r>
+            <a:r>
+              <a:rPr sz="1700" b="0">
+                <a:solidFill>
+                  <a:srgbClr val="222222"/>
+                </a:solidFill>
+                <a:latin typeface="Consolas"/>
+                <a:cs typeface="Consolas"/>
+              </a:rPr>
+              <a:t>Protection Mode</a:t>
+            </a:r>
+            <a:r>
+              <a:rPr sz="1700" b="0">
+                <a:solidFill>
+                  <a:srgbClr val="222222"/>
+                </a:solidFill>
+                <a:latin typeface="맑은 고딕"/>
+              </a:rPr>
+              <a:t> — 2장의 보호 모드</a:t>
             </a:r>
           </a:p>
           <a:p>
@@ -9166,7 +10092,26 @@
                 </a:solidFill>
                 <a:latin typeface="맑은 고딕"/>
               </a:rPr>
-              <a:t>•  `Members` — 구성원·역할, 들여쓰기로 리두 경로</a:t>
+              <a:t>•  </a:t>
+            </a:r>
+            <a:r>
+              <a:rPr sz="1700" b="0">
+                <a:solidFill>
+                  <a:srgbClr val="222222"/>
+                </a:solidFill>
+                <a:latin typeface="Consolas"/>
+                <a:cs typeface="Consolas"/>
+              </a:rPr>
+              <a:t>Members</a:t>
+            </a:r>
+            <a:r>
+              <a:rPr sz="1700" b="0">
+                <a:solidFill>
+                  <a:srgbClr val="222222"/>
+                </a:solidFill>
+                <a:latin typeface="맑은 고딕"/>
+              </a:rPr>
+              <a:t> — 구성원·역할, 들여쓰기로 리두 경로</a:t>
             </a:r>
           </a:p>
           <a:p>
@@ -9182,7 +10127,26 @@
                 </a:solidFill>
                 <a:latin typeface="맑은 고딕"/>
               </a:rPr>
-              <a:t>•  `Fast-Start Failover` — 14장</a:t>
+              <a:t>•  </a:t>
+            </a:r>
+            <a:r>
+              <a:rPr sz="1700" b="0">
+                <a:solidFill>
+                  <a:srgbClr val="222222"/>
+                </a:solidFill>
+                <a:latin typeface="Consolas"/>
+                <a:cs typeface="Consolas"/>
+              </a:rPr>
+              <a:t>Fast-Start Failover</a:t>
+            </a:r>
+            <a:r>
+              <a:rPr sz="1700" b="0">
+                <a:solidFill>
+                  <a:srgbClr val="222222"/>
+                </a:solidFill>
+                <a:latin typeface="맑은 고딕"/>
+              </a:rPr>
+              <a:t> — 14장</a:t>
             </a:r>
           </a:p>
           <a:p>
@@ -9198,7 +10162,26 @@
                 </a:solidFill>
                 <a:latin typeface="맑은 고딕"/>
               </a:rPr>
-              <a:t>•  `Configuration Status` — 전체 판정</a:t>
+              <a:t>•  </a:t>
+            </a:r>
+            <a:r>
+              <a:rPr sz="1700" b="0">
+                <a:solidFill>
+                  <a:srgbClr val="222222"/>
+                </a:solidFill>
+                <a:latin typeface="Consolas"/>
+                <a:cs typeface="Consolas"/>
+              </a:rPr>
+              <a:t>Configuration Status</a:t>
+            </a:r>
+            <a:r>
+              <a:rPr sz="1700" b="0">
+                <a:solidFill>
+                  <a:srgbClr val="222222"/>
+                </a:solidFill>
+                <a:latin typeface="맑은 고딕"/>
+              </a:rPr>
+              <a:t> — 전체 판정</a:t>
             </a:r>
           </a:p>
           <a:p>
@@ -9214,7 +10197,26 @@
                 </a:solidFill>
                 <a:latin typeface="맑은 고딕"/>
               </a:rPr>
-              <a:t>•  **`status updated N seconds ago`** — 실시간이 아니다</a:t>
+              <a:t>•  </a:t>
+            </a:r>
+            <a:r>
+              <a:rPr sz="1700" b="1">
+                <a:solidFill>
+                  <a:srgbClr val="222222"/>
+                </a:solidFill>
+                <a:latin typeface="Consolas"/>
+                <a:cs typeface="Consolas"/>
+              </a:rPr>
+              <a:t>status updated N seconds ago</a:t>
+            </a:r>
+            <a:r>
+              <a:rPr sz="1700" b="0">
+                <a:solidFill>
+                  <a:srgbClr val="222222"/>
+                </a:solidFill>
+                <a:latin typeface="맑은 고딕"/>
+              </a:rPr>
+              <a:t> — 실시간이 아니다</a:t>
             </a:r>
           </a:p>
         </p:txBody>
@@ -9393,7 +10395,36 @@
                 </a:solidFill>
                 <a:latin typeface="맑은 고딕"/>
               </a:rPr>
-              <a:t>•  Primary — `TRANSPORT-ON` / `TRANSPORT-OFF`</a:t>
+              <a:t>•  Primary — </a:t>
+            </a:r>
+            <a:r>
+              <a:rPr sz="1700" b="0">
+                <a:solidFill>
+                  <a:srgbClr val="222222"/>
+                </a:solidFill>
+                <a:latin typeface="Consolas"/>
+                <a:cs typeface="Consolas"/>
+              </a:rPr>
+              <a:t>TRANSPORT-ON</a:t>
+            </a:r>
+            <a:r>
+              <a:rPr sz="1700" b="0">
+                <a:solidFill>
+                  <a:srgbClr val="222222"/>
+                </a:solidFill>
+                <a:latin typeface="맑은 고딕"/>
+              </a:rPr>
+              <a:t> / </a:t>
+            </a:r>
+            <a:r>
+              <a:rPr sz="1700" b="0">
+                <a:solidFill>
+                  <a:srgbClr val="222222"/>
+                </a:solidFill>
+                <a:latin typeface="Consolas"/>
+                <a:cs typeface="Consolas"/>
+              </a:rPr>
+              <a:t>TRANSPORT-OFF</a:t>
             </a:r>
           </a:p>
           <a:p>
@@ -9409,7 +10440,36 @@
                 </a:solidFill>
                 <a:latin typeface="맑은 고딕"/>
               </a:rPr>
-              <a:t>•  Standby — `APPLY-ON` / `APPLY-OFF`</a:t>
+              <a:t>•  Standby — </a:t>
+            </a:r>
+            <a:r>
+              <a:rPr sz="1700" b="0">
+                <a:solidFill>
+                  <a:srgbClr val="222222"/>
+                </a:solidFill>
+                <a:latin typeface="Consolas"/>
+                <a:cs typeface="Consolas"/>
+              </a:rPr>
+              <a:t>APPLY-ON</a:t>
+            </a:r>
+            <a:r>
+              <a:rPr sz="1700" b="0">
+                <a:solidFill>
+                  <a:srgbClr val="222222"/>
+                </a:solidFill>
+                <a:latin typeface="맑은 고딕"/>
+              </a:rPr>
+              <a:t> / </a:t>
+            </a:r>
+            <a:r>
+              <a:rPr sz="1700" b="0">
+                <a:solidFill>
+                  <a:srgbClr val="222222"/>
+                </a:solidFill>
+                <a:latin typeface="Consolas"/>
+                <a:cs typeface="Consolas"/>
+              </a:rPr>
+              <a:t>APPLY-OFF</a:t>
             </a:r>
           </a:p>
           <a:p>
@@ -9425,7 +10485,16 @@
                 </a:solidFill>
                 <a:latin typeface="맑은 고딕"/>
               </a:rPr>
-              <a:t>•  Broker 는 **목표를 기억하고 실제를 거기에 맞추려 한다**</a:t>
+              <a:t>•  Broker 는 </a:t>
+            </a:r>
+            <a:r>
+              <a:rPr sz="1700" b="1">
+                <a:solidFill>
+                  <a:srgbClr val="222222"/>
+                </a:solidFill>
+                <a:latin typeface="맑은 고딕"/>
+              </a:rPr>
+              <a:t>목표를 기억하고 실제를 거기에 맞추려 한다</a:t>
             </a:r>
           </a:p>
           <a:p>
@@ -9457,7 +10526,26 @@
                 </a:solidFill>
                 <a:latin typeface="맑은 고딕"/>
               </a:rPr>
-              <a:t>•  `Real Time Query: ON` 은 9장의 ADG 가 동작 중이라는 뜻</a:t>
+              <a:t>•  </a:t>
+            </a:r>
+            <a:r>
+              <a:rPr sz="1700" b="0">
+                <a:solidFill>
+                  <a:srgbClr val="222222"/>
+                </a:solidFill>
+                <a:latin typeface="Consolas"/>
+                <a:cs typeface="Consolas"/>
+              </a:rPr>
+              <a:t>Real Time Query: ON</a:t>
+            </a:r>
+            <a:r>
+              <a:rPr sz="1700" b="0">
+                <a:solidFill>
+                  <a:srgbClr val="222222"/>
+                </a:solidFill>
+                <a:latin typeface="맑은 고딕"/>
+              </a:rPr>
+              <a:t> 은 9장의 ADG 가 동작 중이라는 뜻</a:t>
             </a:r>
           </a:p>
         </p:txBody>
@@ -9636,7 +10724,35 @@
                 </a:solidFill>
                 <a:latin typeface="맑은 고딕"/>
               </a:rPr>
-              <a:t>•  `ORA-16766: Redo Apply is stopped` — **원인**</a:t>
+              <a:t>•  </a:t>
+            </a:r>
+            <a:r>
+              <a:rPr sz="1700" b="0">
+                <a:solidFill>
+                  <a:srgbClr val="222222"/>
+                </a:solidFill>
+                <a:latin typeface="Consolas"/>
+                <a:cs typeface="Consolas"/>
+              </a:rPr>
+              <a:t>ORA-16766: Redo Apply is stopped</a:t>
+            </a:r>
+            <a:r>
+              <a:rPr sz="1700" b="0">
+                <a:solidFill>
+                  <a:srgbClr val="222222"/>
+                </a:solidFill>
+                <a:latin typeface="맑은 고딕"/>
+              </a:rPr>
+              <a:t> — </a:t>
+            </a:r>
+            <a:r>
+              <a:rPr sz="1700" b="1">
+                <a:solidFill>
+                  <a:srgbClr val="222222"/>
+                </a:solidFill>
+                <a:latin typeface="맑은 고딕"/>
+              </a:rPr>
+              <a:t>원인</a:t>
             </a:r>
           </a:p>
           <a:p>
@@ -9652,7 +10768,35 @@
                 </a:solidFill>
                 <a:latin typeface="맑은 고딕"/>
               </a:rPr>
-              <a:t>•  `ORA-16853: apply lag has exceeded threshold` — **결과**</a:t>
+              <a:t>•  </a:t>
+            </a:r>
+            <a:r>
+              <a:rPr sz="1700" b="0">
+                <a:solidFill>
+                  <a:srgbClr val="222222"/>
+                </a:solidFill>
+                <a:latin typeface="Consolas"/>
+                <a:cs typeface="Consolas"/>
+              </a:rPr>
+              <a:t>ORA-16853: apply lag has exceeded threshold</a:t>
+            </a:r>
+            <a:r>
+              <a:rPr sz="1700" b="0">
+                <a:solidFill>
+                  <a:srgbClr val="222222"/>
+                </a:solidFill>
+                <a:latin typeface="맑은 고딕"/>
+              </a:rPr>
+              <a:t> — </a:t>
+            </a:r>
+            <a:r>
+              <a:rPr sz="1700" b="1">
+                <a:solidFill>
+                  <a:srgbClr val="222222"/>
+                </a:solidFill>
+                <a:latin typeface="맑은 고딕"/>
+              </a:rPr>
+              <a:t>결과</a:t>
             </a:r>
           </a:p>
           <a:p>
@@ -9668,7 +10812,35 @@
                 </a:solidFill>
                 <a:latin typeface="맑은 고딕"/>
               </a:rPr>
-              <a:t>•  `ORA-16809: multiple warnings detected` — **요약**</a:t>
+              <a:t>•  </a:t>
+            </a:r>
+            <a:r>
+              <a:rPr sz="1700" b="0">
+                <a:solidFill>
+                  <a:srgbClr val="222222"/>
+                </a:solidFill>
+                <a:latin typeface="Consolas"/>
+                <a:cs typeface="Consolas"/>
+              </a:rPr>
+              <a:t>ORA-16809: multiple warnings detected</a:t>
+            </a:r>
+            <a:r>
+              <a:rPr sz="1700" b="0">
+                <a:solidFill>
+                  <a:srgbClr val="222222"/>
+                </a:solidFill>
+                <a:latin typeface="맑은 고딕"/>
+              </a:rPr>
+              <a:t> — </a:t>
+            </a:r>
+            <a:r>
+              <a:rPr sz="1700" b="1">
+                <a:solidFill>
+                  <a:srgbClr val="222222"/>
+                </a:solidFill>
+                <a:latin typeface="맑은 고딕"/>
+              </a:rPr>
+              <a:t>요약</a:t>
             </a:r>
           </a:p>
           <a:p>
@@ -9684,7 +10856,26 @@
                 </a:solidFill>
                 <a:latin typeface="맑은 고딕"/>
               </a:rPr>
-              <a:t>•  실측 `Apply Lag: 13125 days` — 진척 기록이 무의미해진 신호</a:t>
+              <a:t>•  실측 </a:t>
+            </a:r>
+            <a:r>
+              <a:rPr sz="1700" b="0">
+                <a:solidFill>
+                  <a:srgbClr val="222222"/>
+                </a:solidFill>
+                <a:latin typeface="Consolas"/>
+                <a:cs typeface="Consolas"/>
+              </a:rPr>
+              <a:t>Apply Lag: 13125 days</a:t>
+            </a:r>
+            <a:r>
+              <a:rPr sz="1700" b="0">
+                <a:solidFill>
+                  <a:srgbClr val="222222"/>
+                </a:solidFill>
+                <a:latin typeface="맑은 고딕"/>
+              </a:rPr>
+              <a:t> — 진척 기록이 무의미해진 신호</a:t>
             </a:r>
           </a:p>
           <a:p>
@@ -9700,7 +10891,16 @@
                 </a:solidFill>
                 <a:latin typeface="맑은 고딕"/>
               </a:rPr>
-              <a:t>•  **고쳐야 할 것은 하나뿐**</a:t>
+              <a:t>•  </a:t>
+            </a:r>
+            <a:r>
+              <a:rPr sz="1700" b="1">
+                <a:solidFill>
+                  <a:srgbClr val="222222"/>
+                </a:solidFill>
+                <a:latin typeface="맑은 고딕"/>
+              </a:rPr>
+              <a:t>고쳐야 할 것은 하나뿐</a:t>
             </a:r>
           </a:p>
         </p:txBody>
@@ -9895,7 +11095,25 @@
                 </a:solidFill>
                 <a:latin typeface="맑은 고딕"/>
               </a:rPr>
-              <a:t>•  실제 원인은 **알림 로그**에 있었다</a:t>
+              <a:t>•  실제 원인은 </a:t>
+            </a:r>
+            <a:r>
+              <a:rPr sz="1700" b="1">
+                <a:solidFill>
+                  <a:srgbClr val="222222"/>
+                </a:solidFill>
+                <a:latin typeface="맑은 고딕"/>
+              </a:rPr>
+              <a:t>알림 로그</a:t>
+            </a:r>
+            <a:r>
+              <a:rPr sz="1700" b="0">
+                <a:solidFill>
+                  <a:srgbClr val="222222"/>
+                </a:solidFill>
+                <a:latin typeface="맑은 고딕"/>
+              </a:rPr>
+              <a:t>에 있었다</a:t>
             </a:r>
           </a:p>
           <a:p>
@@ -9911,7 +11129,45 @@
                 </a:solidFill>
                 <a:latin typeface="맑은 고딕"/>
               </a:rPr>
-              <a:t>•  `ORA-00600 [krr_parse_lwn_header]` + `ORA-10877` ×4</a:t>
+              <a:t>•  </a:t>
+            </a:r>
+            <a:r>
+              <a:rPr sz="1700" b="0">
+                <a:solidFill>
+                  <a:srgbClr val="222222"/>
+                </a:solidFill>
+                <a:latin typeface="Consolas"/>
+                <a:cs typeface="Consolas"/>
+              </a:rPr>
+              <a:t>ORA-00600 [krr_parse_lwn_header]</a:t>
+            </a:r>
+            <a:r>
+              <a:rPr sz="1700" b="0">
+                <a:solidFill>
+                  <a:srgbClr val="222222"/>
+                </a:solidFill>
+                <a:latin typeface="맑은 고딕"/>
+              </a:rPr>
+              <a:t> + </a:t>
+            </a:r>
+            <a:r>
+              <a:rPr sz="1700" b="0">
+                <a:solidFill>
+                  <a:srgbClr val="222222"/>
+                </a:solidFill>
+                <a:latin typeface="Consolas"/>
+                <a:cs typeface="Consolas"/>
+              </a:rPr>
+              <a:t>ORA-10877</a:t>
+            </a:r>
+            <a:r>
+              <a:rPr sz="1700" b="0">
+                <a:solidFill>
+                  <a:srgbClr val="222222"/>
+                </a:solidFill>
+                <a:latin typeface="맑은 고딕"/>
+              </a:rPr>
+              <a:t> ×4</a:t>
             </a:r>
           </a:p>
           <a:p>
@@ -9927,7 +11183,16 @@
                 </a:solidFill>
                 <a:latin typeface="맑은 고딕"/>
               </a:rPr>
-              <a:t>•  Broker 화면에는 그 흔적이 **전혀 없었다**</a:t>
+              <a:t>•  Broker 화면에는 그 흔적이 </a:t>
+            </a:r>
+            <a:r>
+              <a:rPr sz="1700" b="1">
+                <a:solidFill>
+                  <a:srgbClr val="222222"/>
+                </a:solidFill>
+                <a:latin typeface="맑은 고딕"/>
+              </a:rPr>
+              <a:t>전혀 없었다</a:t>
             </a:r>
           </a:p>
         </p:txBody>
@@ -10361,7 +11626,17 @@
                 </a:solidFill>
                 <a:latin typeface="맑은 고딕"/>
               </a:rPr>
-              <a:t>•  `EDIT DATABASE 'boston' SET STATE='APPLY-OFF';`</a:t>
+              <a:t>•  </a:t>
+            </a:r>
+            <a:r>
+              <a:rPr sz="1700" b="0">
+                <a:solidFill>
+                  <a:srgbClr val="222222"/>
+                </a:solidFill>
+                <a:latin typeface="Consolas"/>
+                <a:cs typeface="Consolas"/>
+              </a:rPr>
+              <a:t>EDIT DATABASE 'boston' SET STATE='APPLY-OFF';</a:t>
             </a:r>
           </a:p>
           <a:p>
@@ -10377,7 +11652,36 @@
                 </a:solidFill>
                 <a:latin typeface="맑은 고딕"/>
               </a:rPr>
-              <a:t>•  `READ ONLY WITH APPLY` → `READ ONLY`</a:t>
+              <a:t>•  </a:t>
+            </a:r>
+            <a:r>
+              <a:rPr sz="1700" b="0">
+                <a:solidFill>
+                  <a:srgbClr val="222222"/>
+                </a:solidFill>
+                <a:latin typeface="Consolas"/>
+                <a:cs typeface="Consolas"/>
+              </a:rPr>
+              <a:t>READ ONLY WITH APPLY</a:t>
+            </a:r>
+            <a:r>
+              <a:rPr sz="1700" b="0">
+                <a:solidFill>
+                  <a:srgbClr val="222222"/>
+                </a:solidFill>
+                <a:latin typeface="맑은 고딕"/>
+              </a:rPr>
+              <a:t> → </a:t>
+            </a:r>
+            <a:r>
+              <a:rPr sz="1700" b="0">
+                <a:solidFill>
+                  <a:srgbClr val="222222"/>
+                </a:solidFill>
+                <a:latin typeface="Consolas"/>
+                <a:cs typeface="Consolas"/>
+              </a:rPr>
+              <a:t>READ ONLY</a:t>
             </a:r>
           </a:p>
           <a:p>
@@ -10393,7 +11697,36 @@
                 </a:solidFill>
                 <a:latin typeface="맑은 고딕"/>
               </a:rPr>
-              <a:t>•  `MANAGED REAL TIME APPLY` → `IDLE`</a:t>
+              <a:t>•  </a:t>
+            </a:r>
+            <a:r>
+              <a:rPr sz="1700" b="0">
+                <a:solidFill>
+                  <a:srgbClr val="222222"/>
+                </a:solidFill>
+                <a:latin typeface="Consolas"/>
+                <a:cs typeface="Consolas"/>
+              </a:rPr>
+              <a:t>MANAGED REAL TIME APPLY</a:t>
+            </a:r>
+            <a:r>
+              <a:rPr sz="1700" b="0">
+                <a:solidFill>
+                  <a:srgbClr val="222222"/>
+                </a:solidFill>
+                <a:latin typeface="맑은 고딕"/>
+              </a:rPr>
+              <a:t> → </a:t>
+            </a:r>
+            <a:r>
+              <a:rPr sz="1700" b="0">
+                <a:solidFill>
+                  <a:srgbClr val="222222"/>
+                </a:solidFill>
+                <a:latin typeface="Consolas"/>
+                <a:cs typeface="Consolas"/>
+              </a:rPr>
+              <a:t>IDLE</a:t>
             </a:r>
           </a:p>
           <a:p>
@@ -10409,7 +11742,16 @@
                 </a:solidFill>
                 <a:latin typeface="맑은 고딕"/>
               </a:rPr>
-              <a:t>•  MRP0 1개 → **0개**</a:t>
+              <a:t>•  MRP0 1개 → </a:t>
+            </a:r>
+            <a:r>
+              <a:rPr sz="1700" b="1">
+                <a:solidFill>
+                  <a:srgbClr val="222222"/>
+                </a:solidFill>
+                <a:latin typeface="맑은 고딕"/>
+              </a:rPr>
+              <a:t>0개</a:t>
             </a:r>
           </a:p>
           <a:p>
@@ -10425,7 +11767,44 @@
                 </a:solidFill>
                 <a:latin typeface="맑은 고딕"/>
               </a:rPr>
-              <a:t>•  `Database Status` 는 **SUCCESS** — Intended State 도 함께 바뀌었다</a:t>
+              <a:t>•  </a:t>
+            </a:r>
+            <a:r>
+              <a:rPr sz="1700" b="0">
+                <a:solidFill>
+                  <a:srgbClr val="222222"/>
+                </a:solidFill>
+                <a:latin typeface="Consolas"/>
+                <a:cs typeface="Consolas"/>
+              </a:rPr>
+              <a:t>Database Status</a:t>
+            </a:r>
+            <a:r>
+              <a:rPr sz="1700" b="0">
+                <a:solidFill>
+                  <a:srgbClr val="222222"/>
+                </a:solidFill>
+                <a:latin typeface="맑은 고딕"/>
+              </a:rPr>
+              <a:t> 는 </a:t>
+            </a:r>
+            <a:r>
+              <a:rPr sz="1700" b="1">
+                <a:solidFill>
+                  <a:srgbClr val="222222"/>
+                </a:solidFill>
+                <a:latin typeface="맑은 고딕"/>
+              </a:rPr>
+              <a:t>SUCCESS</a:t>
+            </a:r>
+            <a:r>
+              <a:rPr sz="1700" b="0">
+                <a:solidFill>
+                  <a:srgbClr val="222222"/>
+                </a:solidFill>
+                <a:latin typeface="맑은 고딕"/>
+              </a:rPr>
+              <a:t> — Intended State 도 함께 바뀌었다</a:t>
             </a:r>
           </a:p>
         </p:txBody>
@@ -10856,7 +12235,36 @@
                 </a:solidFill>
                 <a:latin typeface="맑은 고딕"/>
               </a:rPr>
-              <a:t>•  `SHOW DATABASE 'boston' 'LogXptMode'` → `ASYNC`</a:t>
+              <a:t>•  </a:t>
+            </a:r>
+            <a:r>
+              <a:rPr sz="1700" b="0">
+                <a:solidFill>
+                  <a:srgbClr val="222222"/>
+                </a:solidFill>
+                <a:latin typeface="Consolas"/>
+                <a:cs typeface="Consolas"/>
+              </a:rPr>
+              <a:t>SHOW DATABASE 'boston' 'LogXptMode'</a:t>
+            </a:r>
+            <a:r>
+              <a:rPr sz="1700" b="0">
+                <a:solidFill>
+                  <a:srgbClr val="222222"/>
+                </a:solidFill>
+                <a:latin typeface="맑은 고딕"/>
+              </a:rPr>
+              <a:t> → </a:t>
+            </a:r>
+            <a:r>
+              <a:rPr sz="1700" b="0">
+                <a:solidFill>
+                  <a:srgbClr val="222222"/>
+                </a:solidFill>
+                <a:latin typeface="Consolas"/>
+                <a:cs typeface="Consolas"/>
+              </a:rPr>
+              <a:t>ASYNC</a:t>
             </a:r>
           </a:p>
           <a:p>
@@ -10872,7 +12280,17 @@
                 </a:solidFill>
                 <a:latin typeface="맑은 고딕"/>
               </a:rPr>
-              <a:t>•  `EDIT DATABASE 'boston' SET PROPERTY 'LogXptMode'='SYNC';`</a:t>
+              <a:t>•  </a:t>
+            </a:r>
+            <a:r>
+              <a:rPr sz="1700" b="0">
+                <a:solidFill>
+                  <a:srgbClr val="222222"/>
+                </a:solidFill>
+                <a:latin typeface="Consolas"/>
+                <a:cs typeface="Consolas"/>
+              </a:rPr>
+              <a:t>EDIT DATABASE 'boston' SET PROPERTY 'LogXptMode'='SYNC';</a:t>
             </a:r>
           </a:p>
           <a:p>
@@ -10888,7 +12306,36 @@
                 </a:solidFill>
                 <a:latin typeface="맑은 고딕"/>
               </a:rPr>
-              <a:t>•  파라미터가 `ASYNC NOAFFIRM` → **`SYNC AFFIRM`**</a:t>
+              <a:t>•  파라미터가 </a:t>
+            </a:r>
+            <a:r>
+              <a:rPr sz="1700" b="0">
+                <a:solidFill>
+                  <a:srgbClr val="222222"/>
+                </a:solidFill>
+                <a:latin typeface="Consolas"/>
+                <a:cs typeface="Consolas"/>
+              </a:rPr>
+              <a:t>ASYNC NOAFFIRM</a:t>
+            </a:r>
+            <a:r>
+              <a:rPr sz="1700" b="0">
+                <a:solidFill>
+                  <a:srgbClr val="222222"/>
+                </a:solidFill>
+                <a:latin typeface="맑은 고딕"/>
+              </a:rPr>
+              <a:t> → </a:t>
+            </a:r>
+            <a:r>
+              <a:rPr sz="1700" b="1">
+                <a:solidFill>
+                  <a:srgbClr val="222222"/>
+                </a:solidFill>
+                <a:latin typeface="Consolas"/>
+                <a:cs typeface="Consolas"/>
+              </a:rPr>
+              <a:t>SYNC AFFIRM</a:t>
             </a:r>
           </a:p>
           <a:p>
@@ -10904,7 +12351,36 @@
                 </a:solidFill>
                 <a:latin typeface="맑은 고딕"/>
               </a:rPr>
-              <a:t>•  `FASTSYNC` 를 주면 `SYNC NOAFFIRM`</a:t>
+              <a:t>•  </a:t>
+            </a:r>
+            <a:r>
+              <a:rPr sz="1700" b="0">
+                <a:solidFill>
+                  <a:srgbClr val="222222"/>
+                </a:solidFill>
+                <a:latin typeface="Consolas"/>
+                <a:cs typeface="Consolas"/>
+              </a:rPr>
+              <a:t>FASTSYNC</a:t>
+            </a:r>
+            <a:r>
+              <a:rPr sz="1700" b="0">
+                <a:solidFill>
+                  <a:srgbClr val="222222"/>
+                </a:solidFill>
+                <a:latin typeface="맑은 고딕"/>
+              </a:rPr>
+              <a:t> 를 주면 </a:t>
+            </a:r>
+            <a:r>
+              <a:rPr sz="1700" b="0">
+                <a:solidFill>
+                  <a:srgbClr val="222222"/>
+                </a:solidFill>
+                <a:latin typeface="Consolas"/>
+                <a:cs typeface="Consolas"/>
+              </a:rPr>
+              <a:t>SYNC NOAFFIRM</a:t>
             </a:r>
           </a:p>
         </p:txBody>
@@ -11083,7 +12559,17 @@
                 </a:solidFill>
                 <a:latin typeface="맑은 고딕"/>
               </a:rPr>
-              <a:t>•  `EDIT CONFIGURATION SET PROTECTION MODE AS MAXAVAILABILITY;`</a:t>
+              <a:t>•  </a:t>
+            </a:r>
+            <a:r>
+              <a:rPr sz="1700" b="0">
+                <a:solidFill>
+                  <a:srgbClr val="222222"/>
+                </a:solidFill>
+                <a:latin typeface="Consolas"/>
+                <a:cs typeface="Consolas"/>
+              </a:rPr>
+              <a:t>EDIT CONFIGURATION SET PROTECTION MODE AS MAXAVAILABILITY;</a:t>
             </a:r>
           </a:p>
           <a:p>
@@ -11115,7 +12601,45 @@
                 </a:solidFill>
                 <a:latin typeface="맑은 고딕"/>
               </a:rPr>
-              <a:t>•  다만 전제는 같다 — `LogXptMode` 가 `SYNC` 여야 한다</a:t>
+              <a:t>•  다만 전제는 같다 — </a:t>
+            </a:r>
+            <a:r>
+              <a:rPr sz="1700" b="0">
+                <a:solidFill>
+                  <a:srgbClr val="222222"/>
+                </a:solidFill>
+                <a:latin typeface="Consolas"/>
+                <a:cs typeface="Consolas"/>
+              </a:rPr>
+              <a:t>LogXptMode</a:t>
+            </a:r>
+            <a:r>
+              <a:rPr sz="1700" b="0">
+                <a:solidFill>
+                  <a:srgbClr val="222222"/>
+                </a:solidFill>
+                <a:latin typeface="맑은 고딕"/>
+              </a:rPr>
+              <a:t> 가 </a:t>
+            </a:r>
+            <a:r>
+              <a:rPr sz="1700" b="0">
+                <a:solidFill>
+                  <a:srgbClr val="222222"/>
+                </a:solidFill>
+                <a:latin typeface="Consolas"/>
+                <a:cs typeface="Consolas"/>
+              </a:rPr>
+              <a:t>SYNC</a:t>
+            </a:r>
+            <a:r>
+              <a:rPr sz="1700" b="0">
+                <a:solidFill>
+                  <a:srgbClr val="222222"/>
+                </a:solidFill>
+                <a:latin typeface="맑은 고딕"/>
+              </a:rPr>
+              <a:t> 여야 한다</a:t>
             </a:r>
           </a:p>
           <a:p>
@@ -11131,7 +12655,25 @@
                 </a:solidFill>
                 <a:latin typeface="맑은 고딕"/>
               </a:rPr>
-              <a:t>•  내릴 때도 **보호 모드를 먼저**, 전송 방식을 나중에</a:t>
+              <a:t>•  내릴 때도 </a:t>
+            </a:r>
+            <a:r>
+              <a:rPr sz="1700" b="1">
+                <a:solidFill>
+                  <a:srgbClr val="222222"/>
+                </a:solidFill>
+                <a:latin typeface="맑은 고딕"/>
+              </a:rPr>
+              <a:t>보호 모드를 먼저</a:t>
+            </a:r>
+            <a:r>
+              <a:rPr sz="1700" b="0">
+                <a:solidFill>
+                  <a:srgbClr val="222222"/>
+                </a:solidFill>
+                <a:latin typeface="맑은 고딕"/>
+              </a:rPr>
+              <a:t>, 전송 방식을 나중에</a:t>
             </a:r>
           </a:p>
         </p:txBody>
@@ -11549,7 +13091,36 @@
                 </a:solidFill>
                 <a:latin typeface="맑은 고딕"/>
               </a:rPr>
-              <a:t>•  SQL 로 `log_archive_dest_2` 변경 → **`System altered.`**</a:t>
+              <a:t>•  SQL 로 </a:t>
+            </a:r>
+            <a:r>
+              <a:rPr sz="1700" b="0">
+                <a:solidFill>
+                  <a:srgbClr val="222222"/>
+                </a:solidFill>
+                <a:latin typeface="Consolas"/>
+                <a:cs typeface="Consolas"/>
+              </a:rPr>
+              <a:t>log_archive_dest_2</a:t>
+            </a:r>
+            <a:r>
+              <a:rPr sz="1700" b="0">
+                <a:solidFill>
+                  <a:srgbClr val="222222"/>
+                </a:solidFill>
+                <a:latin typeface="맑은 고딕"/>
+              </a:rPr>
+              <a:t> 변경 → </a:t>
+            </a:r>
+            <a:r>
+              <a:rPr sz="1700" b="1">
+                <a:solidFill>
+                  <a:srgbClr val="222222"/>
+                </a:solidFill>
+                <a:latin typeface="Consolas"/>
+                <a:cs typeface="Consolas"/>
+              </a:rPr>
+              <a:t>System altered.</a:t>
             </a:r>
           </a:p>
           <a:p>
@@ -11565,7 +13136,45 @@
                 </a:solidFill>
                 <a:latin typeface="맑은 고딕"/>
               </a:rPr>
-              <a:t>•  30초 뒤 `SHOW CONFIGURATION` → **`SUCCESS`**. 경고 없음</a:t>
+              <a:t>•  30초 뒤 </a:t>
+            </a:r>
+            <a:r>
+              <a:rPr sz="1700" b="0">
+                <a:solidFill>
+                  <a:srgbClr val="222222"/>
+                </a:solidFill>
+                <a:latin typeface="Consolas"/>
+                <a:cs typeface="Consolas"/>
+              </a:rPr>
+              <a:t>SHOW CONFIGURATION</a:t>
+            </a:r>
+            <a:r>
+              <a:rPr sz="1700" b="0">
+                <a:solidFill>
+                  <a:srgbClr val="222222"/>
+                </a:solidFill>
+                <a:latin typeface="맑은 고딕"/>
+              </a:rPr>
+              <a:t> → </a:t>
+            </a:r>
+            <a:r>
+              <a:rPr sz="1700" b="1">
+                <a:solidFill>
+                  <a:srgbClr val="222222"/>
+                </a:solidFill>
+                <a:latin typeface="Consolas"/>
+                <a:cs typeface="Consolas"/>
+              </a:rPr>
+              <a:t>SUCCESS</a:t>
+            </a:r>
+            <a:r>
+              <a:rPr sz="1700" b="0">
+                <a:solidFill>
+                  <a:srgbClr val="222222"/>
+                </a:solidFill>
+                <a:latin typeface="맑은 고딕"/>
+              </a:rPr>
+              <a:t>. 경고 없음</a:t>
             </a:r>
           </a:p>
           <a:p>
@@ -11581,7 +13190,54 @@
                 </a:solidFill>
                 <a:latin typeface="맑은 고딕"/>
               </a:rPr>
-              <a:t>•  `InconsistentLogXptProps` / `InconsistentProperties` → **비어 있음**</a:t>
+              <a:t>•  </a:t>
+            </a:r>
+            <a:r>
+              <a:rPr sz="1700" b="0">
+                <a:solidFill>
+                  <a:srgbClr val="222222"/>
+                </a:solidFill>
+                <a:latin typeface="Consolas"/>
+                <a:cs typeface="Consolas"/>
+              </a:rPr>
+              <a:t>InconsistentLogXptProps</a:t>
+            </a:r>
+            <a:r>
+              <a:rPr sz="1700" b="0">
+                <a:solidFill>
+                  <a:srgbClr val="222222"/>
+                </a:solidFill>
+                <a:latin typeface="맑은 고딕"/>
+              </a:rPr>
+              <a:t> / </a:t>
+            </a:r>
+            <a:r>
+              <a:rPr sz="1700" b="0">
+                <a:solidFill>
+                  <a:srgbClr val="222222"/>
+                </a:solidFill>
+                <a:latin typeface="Consolas"/>
+                <a:cs typeface="Consolas"/>
+              </a:rPr>
+              <a:t>InconsistentProperties</a:t>
+            </a:r>
+            <a:r>
+              <a:rPr sz="1700" b="0">
+                <a:solidFill>
+                  <a:srgbClr val="222222"/>
+                </a:solidFill>
+                <a:latin typeface="맑은 고딕"/>
+              </a:rPr>
+              <a:t> → </a:t>
+            </a:r>
+            <a:r>
+              <a:rPr sz="1700" b="1">
+                <a:solidFill>
+                  <a:srgbClr val="222222"/>
+                </a:solidFill>
+                <a:latin typeface="맑은 고딕"/>
+              </a:rPr>
+              <a:t>비어 있음</a:t>
             </a:r>
           </a:p>
           <a:p>
@@ -11776,7 +13432,17 @@
                 </a:solidFill>
                 <a:latin typeface="맑은 고딕"/>
               </a:rPr>
-              <a:t>•  `EDIT DATABASE 'boston' SET PROPERTY 'LogXptMode'='ASYNC';`</a:t>
+              <a:t>•  </a:t>
+            </a:r>
+            <a:r>
+              <a:rPr sz="1700" b="0">
+                <a:solidFill>
+                  <a:srgbClr val="222222"/>
+                </a:solidFill>
+                <a:latin typeface="Consolas"/>
+                <a:cs typeface="Consolas"/>
+              </a:rPr>
+              <a:t>EDIT DATABASE 'boston' SET PROPERTY 'LogXptMode'='ASYNC';</a:t>
             </a:r>
           </a:p>
           <a:p>
@@ -11792,7 +13458,25 @@
                 </a:solidFill>
                 <a:latin typeface="맑은 고딕"/>
               </a:rPr>
-              <a:t>•  값이 **원래와 같아도** 상관없다</a:t>
+              <a:t>•  값이 </a:t>
+            </a:r>
+            <a:r>
+              <a:rPr sz="1700" b="1">
+                <a:solidFill>
+                  <a:srgbClr val="222222"/>
+                </a:solidFill>
+                <a:latin typeface="맑은 고딕"/>
+              </a:rPr>
+              <a:t>원래와 같아도</a:t>
+            </a:r>
+            <a:r>
+              <a:rPr sz="1700" b="0">
+                <a:solidFill>
+                  <a:srgbClr val="222222"/>
+                </a:solidFill>
+                <a:latin typeface="맑은 고딕"/>
+              </a:rPr>
+              <a:t> 상관없다</a:t>
             </a:r>
           </a:p>
           <a:p>
@@ -11808,7 +13492,16 @@
                 </a:solidFill>
                 <a:latin typeface="맑은 고딕"/>
               </a:rPr>
-              <a:t>•  속성을 하나라도 적용하면 **문자열 전체가 다시 만들어진다**</a:t>
+              <a:t>•  속성을 하나라도 적용하면 </a:t>
+            </a:r>
+            <a:r>
+              <a:rPr sz="1700" b="1">
+                <a:solidFill>
+                  <a:srgbClr val="222222"/>
+                </a:solidFill>
+                <a:latin typeface="맑은 고딕"/>
+              </a:rPr>
+              <a:t>문자열 전체가 다시 만들어진다</a:t>
             </a:r>
           </a:p>
           <a:p>
@@ -12003,7 +13696,35 @@
                 </a:solidFill>
                 <a:latin typeface="맑은 고딕"/>
               </a:rPr>
-              <a:t>•  판단 기준 — `SHOW DATABASE VERBOSE` **속성 목록에 있으면 Broker 의 것**</a:t>
+              <a:t>•  판단 기준 — </a:t>
+            </a:r>
+            <a:r>
+              <a:rPr sz="1700" b="0">
+                <a:solidFill>
+                  <a:srgbClr val="222222"/>
+                </a:solidFill>
+                <a:latin typeface="Consolas"/>
+                <a:cs typeface="Consolas"/>
+              </a:rPr>
+              <a:t>SHOW DATABASE VERBOSE</a:t>
+            </a:r>
+            <a:r>
+              <a:rPr sz="1700" b="0">
+                <a:solidFill>
+                  <a:srgbClr val="222222"/>
+                </a:solidFill>
+                <a:latin typeface="맑은 고딕"/>
+              </a:rPr>
+              <a:t> </a:t>
+            </a:r>
+            <a:r>
+              <a:rPr sz="1700" b="1">
+                <a:solidFill>
+                  <a:srgbClr val="222222"/>
+                </a:solidFill>
+                <a:latin typeface="맑은 고딕"/>
+              </a:rPr>
+              <a:t>속성 목록에 있으면 Broker 의 것</a:t>
             </a:r>
           </a:p>
           <a:p>
@@ -12019,7 +13740,45 @@
                 </a:solidFill>
                 <a:latin typeface="맑은 고딕"/>
               </a:rPr>
-              <a:t>•  `SGA_TARGET` · `PROCESSES` 는 SQL 로 바꿔도 된다</a:t>
+              <a:t>•  </a:t>
+            </a:r>
+            <a:r>
+              <a:rPr sz="1700" b="0">
+                <a:solidFill>
+                  <a:srgbClr val="222222"/>
+                </a:solidFill>
+                <a:latin typeface="Consolas"/>
+                <a:cs typeface="Consolas"/>
+              </a:rPr>
+              <a:t>SGA_TARGET</a:t>
+            </a:r>
+            <a:r>
+              <a:rPr sz="1700" b="0">
+                <a:solidFill>
+                  <a:srgbClr val="222222"/>
+                </a:solidFill>
+                <a:latin typeface="맑은 고딕"/>
+              </a:rPr>
+              <a:t> · </a:t>
+            </a:r>
+            <a:r>
+              <a:rPr sz="1700" b="0">
+                <a:solidFill>
+                  <a:srgbClr val="222222"/>
+                </a:solidFill>
+                <a:latin typeface="Consolas"/>
+                <a:cs typeface="Consolas"/>
+              </a:rPr>
+              <a:t>PROCESSES</a:t>
+            </a:r>
+            <a:r>
+              <a:rPr sz="1700" b="0">
+                <a:solidFill>
+                  <a:srgbClr val="222222"/>
+                </a:solidFill>
+                <a:latin typeface="맑은 고딕"/>
+              </a:rPr>
+              <a:t> 는 SQL 로 바꿔도 된다</a:t>
             </a:r>
           </a:p>
           <a:p>
@@ -12051,7 +13810,16 @@
                 </a:solidFill>
                 <a:latin typeface="맑은 고딕"/>
               </a:rPr>
-              <a:t>•  그러나 **혼용이 가장 나쁘다**</a:t>
+              <a:t>•  그러나 </a:t>
+            </a:r>
+            <a:r>
+              <a:rPr sz="1700" b="1">
+                <a:solidFill>
+                  <a:srgbClr val="222222"/>
+                </a:solidFill>
+                <a:latin typeface="맑은 고딕"/>
+              </a:rPr>
+              <a:t>혼용이 가장 나쁘다</a:t>
             </a:r>
           </a:p>
         </p:txBody>
@@ -12246,7 +14014,45 @@
                 </a:solidFill>
                 <a:latin typeface="맑은 고딕"/>
               </a:rPr>
-              <a:t>•  `Configuration Status: SUCCESS`, `Real Time Query: ON`, 두 지연 0</a:t>
+              <a:t>•  </a:t>
+            </a:r>
+            <a:r>
+              <a:rPr sz="1700" b="0">
+                <a:solidFill>
+                  <a:srgbClr val="222222"/>
+                </a:solidFill>
+                <a:latin typeface="Consolas"/>
+                <a:cs typeface="Consolas"/>
+              </a:rPr>
+              <a:t>Configuration Status: SUCCESS</a:t>
+            </a:r>
+            <a:r>
+              <a:rPr sz="1700" b="0">
+                <a:solidFill>
+                  <a:srgbClr val="222222"/>
+                </a:solidFill>
+                <a:latin typeface="맑은 고딕"/>
+              </a:rPr>
+              <a:t>, </a:t>
+            </a:r>
+            <a:r>
+              <a:rPr sz="1700" b="0">
+                <a:solidFill>
+                  <a:srgbClr val="222222"/>
+                </a:solidFill>
+                <a:latin typeface="Consolas"/>
+                <a:cs typeface="Consolas"/>
+              </a:rPr>
+              <a:t>Real Time Query: ON</a:t>
+            </a:r>
+            <a:r>
+              <a:rPr sz="1700" b="0">
+                <a:solidFill>
+                  <a:srgbClr val="222222"/>
+                </a:solidFill>
+                <a:latin typeface="맑은 고딕"/>
+              </a:rPr>
+              <a:t>, 두 지연 0</a:t>
             </a:r>
           </a:p>
           <a:p>
@@ -12262,7 +14068,25 @@
                 </a:solidFill>
                 <a:latin typeface="맑은 고딕"/>
               </a:rPr>
-              <a:t>•  **Broker 가 MRP 를 스스로 띄웠다** — SQL 을 실행하지 않았다</a:t>
+              <a:t>•  </a:t>
+            </a:r>
+            <a:r>
+              <a:rPr sz="1700" b="1">
+                <a:solidFill>
+                  <a:srgbClr val="222222"/>
+                </a:solidFill>
+                <a:latin typeface="맑은 고딕"/>
+              </a:rPr>
+              <a:t>Broker 가 MRP 를 스스로 띄웠다</a:t>
+            </a:r>
+            <a:r>
+              <a:rPr sz="1700" b="0">
+                <a:solidFill>
+                  <a:srgbClr val="222222"/>
+                </a:solidFill>
+                <a:latin typeface="맑은 고딕"/>
+              </a:rPr>
+              <a:t> — SQL 을 실행하지 않았다</a:t>
             </a:r>
           </a:p>
           <a:p>
@@ -12278,7 +14102,26 @@
                 </a:solidFill>
                 <a:latin typeface="맑은 고딕"/>
               </a:rPr>
-              <a:t>•  이유 둘 — `SCOPE=BOTH` 설정 + 디스크의 구성 파일</a:t>
+              <a:t>•  이유 둘 — </a:t>
+            </a:r>
+            <a:r>
+              <a:rPr sz="1700" b="0">
+                <a:solidFill>
+                  <a:srgbClr val="222222"/>
+                </a:solidFill>
+                <a:latin typeface="Consolas"/>
+                <a:cs typeface="Consolas"/>
+              </a:rPr>
+              <a:t>SCOPE=BOTH</a:t>
+            </a:r>
+            <a:r>
+              <a:rPr sz="1700" b="0">
+                <a:solidFill>
+                  <a:srgbClr val="222222"/>
+                </a:solidFill>
+                <a:latin typeface="맑은 고딕"/>
+              </a:rPr>
+              <a:t> 설정 + 디스크의 구성 파일</a:t>
             </a:r>
           </a:p>
         </p:txBody>
@@ -12418,7 +14261,25 @@
                 </a:solidFill>
                 <a:latin typeface="맑은 고딕"/>
               </a:rPr>
-              <a:t>•  Broker 는 **번거로운 일**을 대신한다. 어려운 일이 아니다.</a:t>
+              <a:t>•  Broker 는 </a:t>
+            </a:r>
+            <a:r>
+              <a:rPr sz="1600" b="1">
+                <a:solidFill>
+                  <a:srgbClr val="222222"/>
+                </a:solidFill>
+                <a:latin typeface="맑은 고딕"/>
+              </a:rPr>
+              <a:t>번거로운 일</a:t>
+            </a:r>
+            <a:r>
+              <a:rPr sz="1600" b="0">
+                <a:solidFill>
+                  <a:srgbClr val="222222"/>
+                </a:solidFill>
+                <a:latin typeface="맑은 고딕"/>
+              </a:rPr>
+              <a:t>을 대신한다. 어려운 일이 아니다.</a:t>
             </a:r>
           </a:p>
           <a:p>
@@ -12434,7 +14295,61 @@
                 </a:solidFill>
                 <a:latin typeface="맑은 고딕"/>
               </a:rPr>
-              <a:t>•  구성 요소 셋 — **DMON**, **구성 파일**(노드당 2벌), **DGMGRL**.</a:t>
+              <a:t>•  구성 요소 셋 — </a:t>
+            </a:r>
+            <a:r>
+              <a:rPr sz="1600" b="1">
+                <a:solidFill>
+                  <a:srgbClr val="222222"/>
+                </a:solidFill>
+                <a:latin typeface="맑은 고딕"/>
+              </a:rPr>
+              <a:t>DMON</a:t>
+            </a:r>
+            <a:r>
+              <a:rPr sz="1600" b="0">
+                <a:solidFill>
+                  <a:srgbClr val="222222"/>
+                </a:solidFill>
+                <a:latin typeface="맑은 고딕"/>
+              </a:rPr>
+              <a:t>, </a:t>
+            </a:r>
+            <a:r>
+              <a:rPr sz="1600" b="1">
+                <a:solidFill>
+                  <a:srgbClr val="222222"/>
+                </a:solidFill>
+                <a:latin typeface="맑은 고딕"/>
+              </a:rPr>
+              <a:t>구성 파일</a:t>
+            </a:r>
+            <a:r>
+              <a:rPr sz="1600" b="0">
+                <a:solidFill>
+                  <a:srgbClr val="222222"/>
+                </a:solidFill>
+                <a:latin typeface="맑은 고딕"/>
+              </a:rPr>
+              <a:t>(노드당 2벌), </a:t>
+            </a:r>
+            <a:r>
+              <a:rPr sz="1600" b="1">
+                <a:solidFill>
+                  <a:srgbClr val="222222"/>
+                </a:solidFill>
+                <a:latin typeface="맑은 고딕"/>
+              </a:rPr>
+              <a:t>DGMGRL</a:t>
+            </a:r>
+            <a:r>
+              <a:rPr sz="1600" b="0">
+                <a:solidFill>
+                  <a:srgbClr val="222222"/>
+                </a:solidFill>
+                <a:latin typeface="맑은 고딕"/>
+              </a:rPr>
+              <a:t>.</a:t>
             </a:r>
           </a:p>
           <a:p>
@@ -12450,7 +14365,44 @@
                 </a:solidFill>
                 <a:latin typeface="맑은 고딕"/>
               </a:rPr>
-              <a:t>•  DGMGRL 은 전달만 하고 **DMON 이 SQL 로** 실행한다. `drc*.log` 에 흔적.</a:t>
+              <a:t>•  DGMGRL 은 전달만 하고 </a:t>
+            </a:r>
+            <a:r>
+              <a:rPr sz="1600" b="1">
+                <a:solidFill>
+                  <a:srgbClr val="222222"/>
+                </a:solidFill>
+                <a:latin typeface="맑은 고딕"/>
+              </a:rPr>
+              <a:t>DMON 이 SQL 로</a:t>
+            </a:r>
+            <a:r>
+              <a:rPr sz="1600" b="0">
+                <a:solidFill>
+                  <a:srgbClr val="222222"/>
+                </a:solidFill>
+                <a:latin typeface="맑은 고딕"/>
+              </a:rPr>
+              <a:t> 실행한다. </a:t>
+            </a:r>
+            <a:r>
+              <a:rPr sz="1600" b="0">
+                <a:solidFill>
+                  <a:srgbClr val="222222"/>
+                </a:solidFill>
+                <a:latin typeface="Consolas"/>
+                <a:cs typeface="Consolas"/>
+              </a:rPr>
+              <a:t>drc*.log</a:t>
+            </a:r>
+            <a:r>
+              <a:rPr sz="1600" b="0">
+                <a:solidFill>
+                  <a:srgbClr val="222222"/>
+                </a:solidFill>
+                <a:latin typeface="맑은 고딕"/>
+              </a:rPr>
+              <a:t> 에 흔적.</a:t>
             </a:r>
           </a:p>
           <a:p>
@@ -12466,7 +14418,82 @@
                 </a:solidFill>
                 <a:latin typeface="맑은 고딕"/>
               </a:rPr>
-              <a:t>•  `DG_BROKER_START` 기본 `FALSE`. `SCOPE=BOTH` 로 켜면 **재기동 없이** DMON.</a:t>
+              <a:t>•  </a:t>
+            </a:r>
+            <a:r>
+              <a:rPr sz="1600" b="0">
+                <a:solidFill>
+                  <a:srgbClr val="222222"/>
+                </a:solidFill>
+                <a:latin typeface="Consolas"/>
+                <a:cs typeface="Consolas"/>
+              </a:rPr>
+              <a:t>DG_BROKER_START</a:t>
+            </a:r>
+            <a:r>
+              <a:rPr sz="1600" b="0">
+                <a:solidFill>
+                  <a:srgbClr val="222222"/>
+                </a:solidFill>
+                <a:latin typeface="맑은 고딕"/>
+              </a:rPr>
+              <a:t> 기본 </a:t>
+            </a:r>
+            <a:r>
+              <a:rPr sz="1600" b="0">
+                <a:solidFill>
+                  <a:srgbClr val="222222"/>
+                </a:solidFill>
+                <a:latin typeface="Consolas"/>
+                <a:cs typeface="Consolas"/>
+              </a:rPr>
+              <a:t>FALSE</a:t>
+            </a:r>
+            <a:r>
+              <a:rPr sz="1600" b="0">
+                <a:solidFill>
+                  <a:srgbClr val="222222"/>
+                </a:solidFill>
+                <a:latin typeface="맑은 고딕"/>
+              </a:rPr>
+              <a:t>. </a:t>
+            </a:r>
+            <a:r>
+              <a:rPr sz="1600" b="0">
+                <a:solidFill>
+                  <a:srgbClr val="222222"/>
+                </a:solidFill>
+                <a:latin typeface="Consolas"/>
+                <a:cs typeface="Consolas"/>
+              </a:rPr>
+              <a:t>SCOPE=BOTH</a:t>
+            </a:r>
+            <a:r>
+              <a:rPr sz="1600" b="0">
+                <a:solidFill>
+                  <a:srgbClr val="222222"/>
+                </a:solidFill>
+                <a:latin typeface="맑은 고딕"/>
+              </a:rPr>
+              <a:t> 로 켜면 </a:t>
+            </a:r>
+            <a:r>
+              <a:rPr sz="1600" b="1">
+                <a:solidFill>
+                  <a:srgbClr val="222222"/>
+                </a:solidFill>
+                <a:latin typeface="맑은 고딕"/>
+              </a:rPr>
+              <a:t>재기동 없이</a:t>
+            </a:r>
+            <a:r>
+              <a:rPr sz="1600" b="0">
+                <a:solidFill>
+                  <a:srgbClr val="222222"/>
+                </a:solidFill>
+                <a:latin typeface="맑은 고딕"/>
+              </a:rPr>
+              <a:t> DMON.</a:t>
             </a:r>
           </a:p>
           <a:p>
@@ -12482,7 +14509,44 @@
                 </a:solidFill>
                 <a:latin typeface="맑은 고딕"/>
               </a:rPr>
-              <a:t>•  **정적 등록 `&lt;이름&gt;_DGMGRL` 필수** — 역할 전환 중 재기동 구간 때문.</a:t>
+              <a:t>•  </a:t>
+            </a:r>
+            <a:r>
+              <a:rPr sz="1600" b="1">
+                <a:solidFill>
+                  <a:srgbClr val="222222"/>
+                </a:solidFill>
+                <a:latin typeface="맑은 고딕"/>
+              </a:rPr>
+              <a:t>정적 등록 </a:t>
+            </a:r>
+            <a:r>
+              <a:rPr sz="1600" b="1">
+                <a:solidFill>
+                  <a:srgbClr val="222222"/>
+                </a:solidFill>
+                <a:latin typeface="Consolas"/>
+                <a:cs typeface="Consolas"/>
+              </a:rPr>
+              <a:t>&lt;이름&gt;_DGMGRL</a:t>
+            </a:r>
+            <a:r>
+              <a:rPr sz="1600" b="1">
+                <a:solidFill>
+                  <a:srgbClr val="222222"/>
+                </a:solidFill>
+                <a:latin typeface="맑은 고딕"/>
+              </a:rPr>
+              <a:t> 필수</a:t>
+            </a:r>
+            <a:r>
+              <a:rPr sz="1600" b="0">
+                <a:solidFill>
+                  <a:srgbClr val="222222"/>
+                </a:solidFill>
+                <a:latin typeface="맑은 고딕"/>
+              </a:rPr>
+              <a:t> — 역할 전환 중 재기동 구간 때문.</a:t>
             </a:r>
           </a:p>
           <a:p>
@@ -12498,7 +14562,43 @@
                 </a:solidFill>
                 <a:latin typeface="맑은 고딕"/>
               </a:rPr>
-              <a:t>•  Broker 없이 접속 **ORA-16525**, 구성이 없으면 **ORA-16532**.</a:t>
+              <a:t>•  Broker 없이 접속 </a:t>
+            </a:r>
+            <a:r>
+              <a:rPr sz="1600" b="1">
+                <a:solidFill>
+                  <a:srgbClr val="222222"/>
+                </a:solidFill>
+                <a:latin typeface="맑은 고딕"/>
+              </a:rPr>
+              <a:t>ORA-16525</a:t>
+            </a:r>
+            <a:r>
+              <a:rPr sz="1600" b="0">
+                <a:solidFill>
+                  <a:srgbClr val="222222"/>
+                </a:solidFill>
+                <a:latin typeface="맑은 고딕"/>
+              </a:rPr>
+              <a:t>, 구성이 없으면 </a:t>
+            </a:r>
+            <a:r>
+              <a:rPr sz="1600" b="1">
+                <a:solidFill>
+                  <a:srgbClr val="222222"/>
+                </a:solidFill>
+                <a:latin typeface="맑은 고딕"/>
+              </a:rPr>
+              <a:t>ORA-16532</a:t>
+            </a:r>
+            <a:r>
+              <a:rPr sz="1600" b="0">
+                <a:solidFill>
+                  <a:srgbClr val="222222"/>
+                </a:solidFill>
+                <a:latin typeface="맑은 고딕"/>
+              </a:rPr>
+              <a:t>.</a:t>
             </a:r>
           </a:p>
           <a:p>
@@ -12514,7 +14614,64 @@
                 </a:solidFill>
                 <a:latin typeface="맑은 고딕"/>
               </a:rPr>
-              <a:t>•  `CREATE CONFIGURATION` → `ADD DATABASE` → `ENABLE CONFIGURATION`.</a:t>
+              <a:t>•  </a:t>
+            </a:r>
+            <a:r>
+              <a:rPr sz="1600" b="0">
+                <a:solidFill>
+                  <a:srgbClr val="222222"/>
+                </a:solidFill>
+                <a:latin typeface="Consolas"/>
+                <a:cs typeface="Consolas"/>
+              </a:rPr>
+              <a:t>CREATE CONFIGURATION</a:t>
+            </a:r>
+            <a:r>
+              <a:rPr sz="1600" b="0">
+                <a:solidFill>
+                  <a:srgbClr val="222222"/>
+                </a:solidFill>
+                <a:latin typeface="맑은 고딕"/>
+              </a:rPr>
+              <a:t> → </a:t>
+            </a:r>
+            <a:r>
+              <a:rPr sz="1600" b="0">
+                <a:solidFill>
+                  <a:srgbClr val="222222"/>
+                </a:solidFill>
+                <a:latin typeface="Consolas"/>
+                <a:cs typeface="Consolas"/>
+              </a:rPr>
+              <a:t>ADD DATABASE</a:t>
+            </a:r>
+            <a:r>
+              <a:rPr sz="1600" b="0">
+                <a:solidFill>
+                  <a:srgbClr val="222222"/>
+                </a:solidFill>
+                <a:latin typeface="맑은 고딕"/>
+              </a:rPr>
+              <a:t> → </a:t>
+            </a:r>
+            <a:r>
+              <a:rPr sz="1600" b="0">
+                <a:solidFill>
+                  <a:srgbClr val="222222"/>
+                </a:solidFill>
+                <a:latin typeface="Consolas"/>
+                <a:cs typeface="Consolas"/>
+              </a:rPr>
+              <a:t>ENABLE CONFIGURATION</a:t>
+            </a:r>
+            <a:r>
+              <a:rPr sz="1600" b="0">
+                <a:solidFill>
+                  <a:srgbClr val="222222"/>
+                </a:solidFill>
+                <a:latin typeface="맑은 고딕"/>
+              </a:rPr>
+              <a:t>.</a:t>
             </a:r>
           </a:p>
           <a:p>
@@ -12530,7 +14687,44 @@
                 </a:solidFill>
                 <a:latin typeface="맑은 고딕"/>
               </a:rPr>
-              <a:t>•  `connect identifier` 는 **tnsnames 별칭**이다.</a:t>
+              <a:t>•  </a:t>
+            </a:r>
+            <a:r>
+              <a:rPr sz="1600" b="0">
+                <a:solidFill>
+                  <a:srgbClr val="222222"/>
+                </a:solidFill>
+                <a:latin typeface="Consolas"/>
+                <a:cs typeface="Consolas"/>
+              </a:rPr>
+              <a:t>connect identifier</a:t>
+            </a:r>
+            <a:r>
+              <a:rPr sz="1600" b="0">
+                <a:solidFill>
+                  <a:srgbClr val="222222"/>
+                </a:solidFill>
+                <a:latin typeface="맑은 고딕"/>
+              </a:rPr>
+              <a:t> 는 </a:t>
+            </a:r>
+            <a:r>
+              <a:rPr sz="1600" b="1">
+                <a:solidFill>
+                  <a:srgbClr val="222222"/>
+                </a:solidFill>
+                <a:latin typeface="맑은 고딕"/>
+              </a:rPr>
+              <a:t>tnsnames 별칭</a:t>
+            </a:r>
+            <a:r>
+              <a:rPr sz="1600" b="0">
+                <a:solidFill>
+                  <a:srgbClr val="222222"/>
+                </a:solidFill>
+                <a:latin typeface="맑은 고딕"/>
+              </a:rPr>
+              <a:t>이다.</a:t>
             </a:r>
           </a:p>
         </p:txBody>
@@ -12670,7 +14864,43 @@
                 </a:solidFill>
                 <a:latin typeface="맑은 고딕"/>
               </a:rPr>
-              <a:t>•  손으로 설정한 목적지가 있으면 **ORA-16698**. 양쪽을 비운다(**유일한 서비스 영향**).</a:t>
+              <a:t>•  손으로 설정한 목적지가 있으면 </a:t>
+            </a:r>
+            <a:r>
+              <a:rPr sz="1600" b="1">
+                <a:solidFill>
+                  <a:srgbClr val="222222"/>
+                </a:solidFill>
+                <a:latin typeface="맑은 고딕"/>
+              </a:rPr>
+              <a:t>ORA-16698</a:t>
+            </a:r>
+            <a:r>
+              <a:rPr sz="1600" b="0">
+                <a:solidFill>
+                  <a:srgbClr val="222222"/>
+                </a:solidFill>
+                <a:latin typeface="맑은 고딕"/>
+              </a:rPr>
+              <a:t>. 양쪽을 비운다(</a:t>
+            </a:r>
+            <a:r>
+              <a:rPr sz="1600" b="1">
+                <a:solidFill>
+                  <a:srgbClr val="222222"/>
+                </a:solidFill>
+                <a:latin typeface="맑은 고딕"/>
+              </a:rPr>
+              <a:t>유일한 서비스 영향</a:t>
+            </a:r>
+            <a:r>
+              <a:rPr sz="1600" b="0">
+                <a:solidFill>
+                  <a:srgbClr val="222222"/>
+                </a:solidFill>
+                <a:latin typeface="맑은 고딕"/>
+              </a:rPr>
+              <a:t>).</a:t>
             </a:r>
           </a:p>
           <a:p>
@@ -12686,7 +14916,44 @@
                 </a:solidFill>
                 <a:latin typeface="맑은 고딕"/>
               </a:rPr>
-              <a:t>•  활성화 전에는 `(disabled)` 와 **ORA-16905** — 상태 안내다.</a:t>
+              <a:t>•  활성화 전에는 </a:t>
+            </a:r>
+            <a:r>
+              <a:rPr sz="1600" b="0">
+                <a:solidFill>
+                  <a:srgbClr val="222222"/>
+                </a:solidFill>
+                <a:latin typeface="Consolas"/>
+                <a:cs typeface="Consolas"/>
+              </a:rPr>
+              <a:t>(disabled)</a:t>
+            </a:r>
+            <a:r>
+              <a:rPr sz="1600" b="0">
+                <a:solidFill>
+                  <a:srgbClr val="222222"/>
+                </a:solidFill>
+                <a:latin typeface="맑은 고딕"/>
+              </a:rPr>
+              <a:t> 와 </a:t>
+            </a:r>
+            <a:r>
+              <a:rPr sz="1600" b="1">
+                <a:solidFill>
+                  <a:srgbClr val="222222"/>
+                </a:solidFill>
+                <a:latin typeface="맑은 고딕"/>
+              </a:rPr>
+              <a:t>ORA-16905</a:t>
+            </a:r>
+            <a:r>
+              <a:rPr sz="1600" b="0">
+                <a:solidFill>
+                  <a:srgbClr val="222222"/>
+                </a:solidFill>
+                <a:latin typeface="맑은 고딕"/>
+              </a:rPr>
+              <a:t> — 상태 안내다.</a:t>
             </a:r>
           </a:p>
           <a:p>
@@ -12702,7 +14969,62 @@
                 </a:solidFill>
                 <a:latin typeface="맑은 고딕"/>
               </a:rPr>
-              <a:t>•  Broker 는 목적지를 **모든 속성을 명시**해 다시 쓴다. `FAL_SERVER` 는 **비운다**.</a:t>
+              <a:t>•  Broker 는 목적지를 </a:t>
+            </a:r>
+            <a:r>
+              <a:rPr sz="1600" b="1">
+                <a:solidFill>
+                  <a:srgbClr val="222222"/>
+                </a:solidFill>
+                <a:latin typeface="맑은 고딕"/>
+              </a:rPr>
+              <a:t>모든 속성을 명시</a:t>
+            </a:r>
+            <a:r>
+              <a:rPr sz="1600" b="0">
+                <a:solidFill>
+                  <a:srgbClr val="222222"/>
+                </a:solidFill>
+                <a:latin typeface="맑은 고딕"/>
+              </a:rPr>
+              <a:t>해 다시 쓴다. </a:t>
+            </a:r>
+            <a:r>
+              <a:rPr sz="1600" b="0">
+                <a:solidFill>
+                  <a:srgbClr val="222222"/>
+                </a:solidFill>
+                <a:latin typeface="Consolas"/>
+                <a:cs typeface="Consolas"/>
+              </a:rPr>
+              <a:t>FAL_SERVER</a:t>
+            </a:r>
+            <a:r>
+              <a:rPr sz="1600" b="0">
+                <a:solidFill>
+                  <a:srgbClr val="222222"/>
+                </a:solidFill>
+                <a:latin typeface="맑은 고딕"/>
+              </a:rPr>
+              <a:t> 는 </a:t>
+            </a:r>
+            <a:r>
+              <a:rPr sz="1600" b="1">
+                <a:solidFill>
+                  <a:srgbClr val="222222"/>
+                </a:solidFill>
+                <a:latin typeface="맑은 고딕"/>
+              </a:rPr>
+              <a:t>비운다</a:t>
+            </a:r>
+            <a:r>
+              <a:rPr sz="1600" b="0">
+                <a:solidFill>
+                  <a:srgbClr val="222222"/>
+                </a:solidFill>
+                <a:latin typeface="맑은 고딕"/>
+              </a:rPr>
+              <a:t>.</a:t>
             </a:r>
           </a:p>
           <a:p>
@@ -12718,7 +15040,45 @@
                 </a:solidFill>
                 <a:latin typeface="맑은 고딕"/>
               </a:rPr>
-              <a:t>•  `VALID_FOR` 를 **`all_roles`** 로 — 역할 전환 대비.</a:t>
+              <a:t>•  </a:t>
+            </a:r>
+            <a:r>
+              <a:rPr sz="1600" b="0">
+                <a:solidFill>
+                  <a:srgbClr val="222222"/>
+                </a:solidFill>
+                <a:latin typeface="Consolas"/>
+                <a:cs typeface="Consolas"/>
+              </a:rPr>
+              <a:t>VALID_FOR</a:t>
+            </a:r>
+            <a:r>
+              <a:rPr sz="1600" b="0">
+                <a:solidFill>
+                  <a:srgbClr val="222222"/>
+                </a:solidFill>
+                <a:latin typeface="맑은 고딕"/>
+              </a:rPr>
+              <a:t> 를 </a:t>
+            </a:r>
+            <a:r>
+              <a:rPr sz="1600" b="1">
+                <a:solidFill>
+                  <a:srgbClr val="222222"/>
+                </a:solidFill>
+                <a:latin typeface="Consolas"/>
+                <a:cs typeface="Consolas"/>
+              </a:rPr>
+              <a:t>all_roles</a:t>
+            </a:r>
+            <a:r>
+              <a:rPr sz="1600" b="0">
+                <a:solidFill>
+                  <a:srgbClr val="222222"/>
+                </a:solidFill>
+                <a:latin typeface="맑은 고딕"/>
+              </a:rPr>
+              <a:t> 로 — 역할 전환 대비.</a:t>
             </a:r>
           </a:p>
           <a:p>
@@ -12734,7 +15094,26 @@
                 </a:solidFill>
                 <a:latin typeface="맑은 고딕"/>
               </a:rPr>
-              <a:t>•  **`Intended State`** 는 목표 상태. 실제와 다르면 달성 실패.</a:t>
+              <a:t>•  </a:t>
+            </a:r>
+            <a:r>
+              <a:rPr sz="1600" b="1">
+                <a:solidFill>
+                  <a:srgbClr val="222222"/>
+                </a:solidFill>
+                <a:latin typeface="Consolas"/>
+                <a:cs typeface="Consolas"/>
+              </a:rPr>
+              <a:t>Intended State</a:t>
+            </a:r>
+            <a:r>
+              <a:rPr sz="1600" b="0">
+                <a:solidFill>
+                  <a:srgbClr val="222222"/>
+                </a:solidFill>
+                <a:latin typeface="맑은 고딕"/>
+              </a:rPr>
+              <a:t> 는 목표 상태. 실제와 다르면 달성 실패.</a:t>
             </a:r>
           </a:p>
           <a:p>
@@ -12750,7 +15129,25 @@
                 </a:solidFill>
                 <a:latin typeface="맑은 고딕"/>
               </a:rPr>
-              <a:t>•  오류 인과 — **16766(원인) → 16853(결과) → 16809(요약)**.</a:t>
+              <a:t>•  오류 인과 — </a:t>
+            </a:r>
+            <a:r>
+              <a:rPr sz="1600" b="1">
+                <a:solidFill>
+                  <a:srgbClr val="222222"/>
+                </a:solidFill>
+                <a:latin typeface="맑은 고딕"/>
+              </a:rPr>
+              <a:t>16766(원인) → 16853(결과) → 16809(요약)</a:t>
+            </a:r>
+            <a:r>
+              <a:rPr sz="1600" b="0">
+                <a:solidFill>
+                  <a:srgbClr val="222222"/>
+                </a:solidFill>
+                <a:latin typeface="맑은 고딕"/>
+              </a:rPr>
+              <a:t>.</a:t>
             </a:r>
           </a:p>
           <a:p>
@@ -12766,7 +15163,25 @@
                 </a:solidFill>
                 <a:latin typeface="맑은 고딕"/>
               </a:rPr>
-              <a:t>•  Broker 는 "멈췄다" 까지만. **왜 멈췄는지는 알림 로그**에.</a:t>
+              <a:t>•  Broker 는 "멈췄다" 까지만. </a:t>
+            </a:r>
+            <a:r>
+              <a:rPr sz="1600" b="1">
+                <a:solidFill>
+                  <a:srgbClr val="222222"/>
+                </a:solidFill>
+                <a:latin typeface="맑은 고딕"/>
+              </a:rPr>
+              <a:t>왜 멈췄는지는 알림 로그</a:t>
+            </a:r>
+            <a:r>
+              <a:rPr sz="1600" b="0">
+                <a:solidFill>
+                  <a:srgbClr val="222222"/>
+                </a:solidFill>
+                <a:latin typeface="맑은 고딕"/>
+              </a:rPr>
+              <a:t>에.</a:t>
             </a:r>
           </a:p>
           <a:p>
@@ -12782,7 +15197,25 @@
                 </a:solidFill>
                 <a:latin typeface="맑은 고딕"/>
               </a:rPr>
-              <a:t>•  SQL 로 바꿔도 실측에서 **30초 안에 경고가 없었다**. 속성 재적용으로 회복.</a:t>
+              <a:t>•  SQL 로 바꿔도 실측에서 </a:t>
+            </a:r>
+            <a:r>
+              <a:rPr sz="1600" b="1">
+                <a:solidFill>
+                  <a:srgbClr val="222222"/>
+                </a:solidFill>
+                <a:latin typeface="맑은 고딕"/>
+              </a:rPr>
+              <a:t>30초 안에 경고가 없었다</a:t>
+            </a:r>
+            <a:r>
+              <a:rPr sz="1600" b="0">
+                <a:solidFill>
+                  <a:srgbClr val="222222"/>
+                </a:solidFill>
+                <a:latin typeface="맑은 고딕"/>
+              </a:rPr>
+              <a:t>. 속성 재적용으로 회복.</a:t>
             </a:r>
           </a:p>
         </p:txBody>
@@ -13436,7 +15869,26 @@
                 </a:solidFill>
                 <a:latin typeface="맑은 고딕"/>
               </a:rPr>
-              <a:t>•  양쪽 `LOG_ARCHIVE_DEST_2` 를 각각 작성</a:t>
+              <a:t>•  양쪽 </a:t>
+            </a:r>
+            <a:r>
+              <a:rPr sz="1700" b="0">
+                <a:solidFill>
+                  <a:srgbClr val="222222"/>
+                </a:solidFill>
+                <a:latin typeface="Consolas"/>
+                <a:cs typeface="Consolas"/>
+              </a:rPr>
+              <a:t>LOG_ARCHIVE_DEST_2</a:t>
+            </a:r>
+            <a:r>
+              <a:rPr sz="1700" b="0">
+                <a:solidFill>
+                  <a:srgbClr val="222222"/>
+                </a:solidFill>
+                <a:latin typeface="맑은 고딕"/>
+              </a:rPr>
+              <a:t> 를 각각 작성</a:t>
             </a:r>
           </a:p>
           <a:p>
@@ -13452,7 +15904,26 @@
                 </a:solidFill>
                 <a:latin typeface="맑은 고딕"/>
               </a:rPr>
-              <a:t>•  `FAL_SERVER` 를 서로 가리키게 설정</a:t>
+              <a:t>•  </a:t>
+            </a:r>
+            <a:r>
+              <a:rPr sz="1700" b="0">
+                <a:solidFill>
+                  <a:srgbClr val="222222"/>
+                </a:solidFill>
+                <a:latin typeface="Consolas"/>
+                <a:cs typeface="Consolas"/>
+              </a:rPr>
+              <a:t>FAL_SERVER</a:t>
+            </a:r>
+            <a:r>
+              <a:rPr sz="1700" b="0">
+                <a:solidFill>
+                  <a:srgbClr val="222222"/>
+                </a:solidFill>
+                <a:latin typeface="맑은 고딕"/>
+              </a:rPr>
+              <a:t> 를 서로 가리키게 설정</a:t>
             </a:r>
           </a:p>
           <a:p>
@@ -13468,7 +15939,26 @@
                 </a:solidFill>
                 <a:latin typeface="맑은 고딕"/>
               </a:rPr>
-              <a:t>•  `LOG_ARCHIVE_CONFIG` 목록을 동기화</a:t>
+              <a:t>•  </a:t>
+            </a:r>
+            <a:r>
+              <a:rPr sz="1700" b="0">
+                <a:solidFill>
+                  <a:srgbClr val="222222"/>
+                </a:solidFill>
+                <a:latin typeface="Consolas"/>
+                <a:cs typeface="Consolas"/>
+              </a:rPr>
+              <a:t>LOG_ARCHIVE_CONFIG</a:t>
+            </a:r>
+            <a:r>
+              <a:rPr sz="1700" b="0">
+                <a:solidFill>
+                  <a:srgbClr val="222222"/>
+                </a:solidFill>
+                <a:latin typeface="맑은 고딕"/>
+              </a:rPr>
+              <a:t> 목록을 동기화</a:t>
             </a:r>
           </a:p>
           <a:p>
@@ -13484,7 +15974,36 @@
                 </a:solidFill>
                 <a:latin typeface="맑은 고딕"/>
               </a:rPr>
-              <a:t>•  실측에서 발견 — chicago `online_logfiles` / boston `online_logfile`</a:t>
+              <a:t>•  실측에서 발견 — chicago </a:t>
+            </a:r>
+            <a:r>
+              <a:rPr sz="1700" b="0">
+                <a:solidFill>
+                  <a:srgbClr val="222222"/>
+                </a:solidFill>
+                <a:latin typeface="Consolas"/>
+                <a:cs typeface="Consolas"/>
+              </a:rPr>
+              <a:t>online_logfiles</a:t>
+            </a:r>
+            <a:r>
+              <a:rPr sz="1700" b="0">
+                <a:solidFill>
+                  <a:srgbClr val="222222"/>
+                </a:solidFill>
+                <a:latin typeface="맑은 고딕"/>
+              </a:rPr>
+              <a:t> / boston </a:t>
+            </a:r>
+            <a:r>
+              <a:rPr sz="1700" b="0">
+                <a:solidFill>
+                  <a:srgbClr val="222222"/>
+                </a:solidFill>
+                <a:latin typeface="Consolas"/>
+                <a:cs typeface="Consolas"/>
+              </a:rPr>
+              <a:t>online_logfile</a:t>
             </a:r>
           </a:p>
           <a:p>
@@ -13500,7 +16019,16 @@
                 </a:solidFill>
                 <a:latin typeface="맑은 고딕"/>
               </a:rPr>
-              <a:t>•  동작에는 지장 없지만 **사람이 적었다는 흔적**</a:t>
+              <a:t>•  동작에는 지장 없지만 </a:t>
+            </a:r>
+            <a:r>
+              <a:rPr sz="1700" b="1">
+                <a:solidFill>
+                  <a:srgbClr val="222222"/>
+                </a:solidFill>
+                <a:latin typeface="맑은 고딕"/>
+              </a:rPr>
+              <a:t>사람이 적었다는 흔적</a:t>
             </a:r>
           </a:p>
         </p:txBody>
@@ -13679,7 +16207,25 @@
                 </a:solidFill>
                 <a:latin typeface="맑은 고딕"/>
               </a:rPr>
-              <a:t>•  **DMON** — 각 DB 의 백그라운드 프로세스. 구성을 유지하고 상대와 통신</a:t>
+              <a:t>•  </a:t>
+            </a:r>
+            <a:r>
+              <a:rPr sz="1700" b="1">
+                <a:solidFill>
+                  <a:srgbClr val="222222"/>
+                </a:solidFill>
+                <a:latin typeface="맑은 고딕"/>
+              </a:rPr>
+              <a:t>DMON</a:t>
+            </a:r>
+            <a:r>
+              <a:rPr sz="1700" b="0">
+                <a:solidFill>
+                  <a:srgbClr val="222222"/>
+                </a:solidFill>
+                <a:latin typeface="맑은 고딕"/>
+              </a:rPr>
+              <a:t> — 각 DB 의 백그라운드 프로세스. 구성을 유지하고 상대와 통신</a:t>
             </a:r>
           </a:p>
           <a:p>
@@ -13695,7 +16241,54 @@
                 </a:solidFill>
                 <a:latin typeface="맑은 고딕"/>
               </a:rPr>
-              <a:t>•  **구성 파일** — 노드당 두 벌. `dr1&lt;이름&gt;.dat` / `dr2&lt;이름&gt;.dat`</a:t>
+              <a:t>•  </a:t>
+            </a:r>
+            <a:r>
+              <a:rPr sz="1700" b="1">
+                <a:solidFill>
+                  <a:srgbClr val="222222"/>
+                </a:solidFill>
+                <a:latin typeface="맑은 고딕"/>
+              </a:rPr>
+              <a:t>구성 파일</a:t>
+            </a:r>
+            <a:r>
+              <a:rPr sz="1700" b="0">
+                <a:solidFill>
+                  <a:srgbClr val="222222"/>
+                </a:solidFill>
+                <a:latin typeface="맑은 고딕"/>
+              </a:rPr>
+              <a:t> — 노드당 두 벌. </a:t>
+            </a:r>
+            <a:r>
+              <a:rPr sz="1700" b="0">
+                <a:solidFill>
+                  <a:srgbClr val="222222"/>
+                </a:solidFill>
+                <a:latin typeface="Consolas"/>
+                <a:cs typeface="Consolas"/>
+              </a:rPr>
+              <a:t>dr1&lt;이름&gt;.dat</a:t>
+            </a:r>
+            <a:r>
+              <a:rPr sz="1700" b="0">
+                <a:solidFill>
+                  <a:srgbClr val="222222"/>
+                </a:solidFill>
+                <a:latin typeface="맑은 고딕"/>
+              </a:rPr>
+              <a:t> / </a:t>
+            </a:r>
+            <a:r>
+              <a:rPr sz="1700" b="0">
+                <a:solidFill>
+                  <a:srgbClr val="222222"/>
+                </a:solidFill>
+                <a:latin typeface="Consolas"/>
+                <a:cs typeface="Consolas"/>
+              </a:rPr>
+              <a:t>dr2&lt;이름&gt;.dat</a:t>
             </a:r>
           </a:p>
           <a:p>
@@ -13711,7 +16304,25 @@
                 </a:solidFill>
                 <a:latin typeface="맑은 고딕"/>
               </a:rPr>
-              <a:t>•  **DGMGRL** — 명령줄 도구</a:t>
+              <a:t>•  </a:t>
+            </a:r>
+            <a:r>
+              <a:rPr sz="1700" b="1">
+                <a:solidFill>
+                  <a:srgbClr val="222222"/>
+                </a:solidFill>
+                <a:latin typeface="맑은 고딕"/>
+              </a:rPr>
+              <a:t>DGMGRL</a:t>
+            </a:r>
+            <a:r>
+              <a:rPr sz="1700" b="0">
+                <a:solidFill>
+                  <a:srgbClr val="222222"/>
+                </a:solidFill>
+                <a:latin typeface="맑은 고딕"/>
+              </a:rPr>
+              <a:t> — 명령줄 도구</a:t>
             </a:r>
           </a:p>
           <a:p>
@@ -13727,7 +16338,16 @@
                 </a:solidFill>
                 <a:latin typeface="맑은 고딕"/>
               </a:rPr>
-              <a:t>•  **DGMGRL 은 전달만 하고 실제 작업은 DMON 이 한다**</a:t>
+              <a:t>•  </a:t>
+            </a:r>
+            <a:r>
+              <a:rPr sz="1700" b="1">
+                <a:solidFill>
+                  <a:srgbClr val="222222"/>
+                </a:solidFill>
+                <a:latin typeface="맑은 고딕"/>
+              </a:rPr>
+              <a:t>DGMGRL 은 전달만 하고 실제 작업은 DMON 이 한다</a:t>
             </a:r>
           </a:p>
         </p:txBody>
@@ -14145,7 +16765,35 @@
                 </a:solidFill>
                 <a:latin typeface="맑은 고딕"/>
               </a:rPr>
-              <a:t>•  `dg_broker_start` = **FALSE**</a:t>
+              <a:t>•  </a:t>
+            </a:r>
+            <a:r>
+              <a:rPr sz="1700" b="0">
+                <a:solidFill>
+                  <a:srgbClr val="222222"/>
+                </a:solidFill>
+                <a:latin typeface="Consolas"/>
+                <a:cs typeface="Consolas"/>
+              </a:rPr>
+              <a:t>dg_broker_start</a:t>
+            </a:r>
+            <a:r>
+              <a:rPr sz="1700" b="0">
+                <a:solidFill>
+                  <a:srgbClr val="222222"/>
+                </a:solidFill>
+                <a:latin typeface="맑은 고딕"/>
+              </a:rPr>
+              <a:t> = </a:t>
+            </a:r>
+            <a:r>
+              <a:rPr sz="1700" b="1">
+                <a:solidFill>
+                  <a:srgbClr val="222222"/>
+                </a:solidFill>
+                <a:latin typeface="맑은 고딕"/>
+              </a:rPr>
+              <a:t>FALSE</a:t>
             </a:r>
           </a:p>
           <a:p>
@@ -14161,7 +16809,36 @@
                 </a:solidFill>
                 <a:latin typeface="맑은 고딕"/>
               </a:rPr>
-              <a:t>•  `dg_broker_config_file1` = `.../dbs/dr1chicago.dat`</a:t>
+              <a:t>•  </a:t>
+            </a:r>
+            <a:r>
+              <a:rPr sz="1700" b="0">
+                <a:solidFill>
+                  <a:srgbClr val="222222"/>
+                </a:solidFill>
+                <a:latin typeface="Consolas"/>
+                <a:cs typeface="Consolas"/>
+              </a:rPr>
+              <a:t>dg_broker_config_file1</a:t>
+            </a:r>
+            <a:r>
+              <a:rPr sz="1700" b="0">
+                <a:solidFill>
+                  <a:srgbClr val="222222"/>
+                </a:solidFill>
+                <a:latin typeface="맑은 고딕"/>
+              </a:rPr>
+              <a:t> = </a:t>
+            </a:r>
+            <a:r>
+              <a:rPr sz="1700" b="0">
+                <a:solidFill>
+                  <a:srgbClr val="222222"/>
+                </a:solidFill>
+                <a:latin typeface="Consolas"/>
+                <a:cs typeface="Consolas"/>
+              </a:rPr>
+              <a:t>.../dbs/dr1chicago.dat</a:t>
             </a:r>
           </a:p>
           <a:p>
@@ -14177,7 +16854,36 @@
                 </a:solidFill>
                 <a:latin typeface="맑은 고딕"/>
               </a:rPr>
-              <a:t>•  `dg_broker_config_file2` = `.../dbs/dr2chicago.dat`</a:t>
+              <a:t>•  </a:t>
+            </a:r>
+            <a:r>
+              <a:rPr sz="1700" b="0">
+                <a:solidFill>
+                  <a:srgbClr val="222222"/>
+                </a:solidFill>
+                <a:latin typeface="Consolas"/>
+                <a:cs typeface="Consolas"/>
+              </a:rPr>
+              <a:t>dg_broker_config_file2</a:t>
+            </a:r>
+            <a:r>
+              <a:rPr sz="1700" b="0">
+                <a:solidFill>
+                  <a:srgbClr val="222222"/>
+                </a:solidFill>
+                <a:latin typeface="맑은 고딕"/>
+              </a:rPr>
+              <a:t> = </a:t>
+            </a:r>
+            <a:r>
+              <a:rPr sz="1700" b="0">
+                <a:solidFill>
+                  <a:srgbClr val="222222"/>
+                </a:solidFill>
+                <a:latin typeface="Consolas"/>
+                <a:cs typeface="Consolas"/>
+              </a:rPr>
+              <a:t>.../dbs/dr2chicago.dat</a:t>
             </a:r>
           </a:p>
           <a:p>
@@ -14193,7 +16899,25 @@
                 </a:solidFill>
                 <a:latin typeface="맑은 고딕"/>
               </a:rPr>
-              <a:t>•  두 벌인 이유는 **다중화**. 실무에서는 서로 다른 디스크에</a:t>
+              <a:t>•  두 벌인 이유는 </a:t>
+            </a:r>
+            <a:r>
+              <a:rPr sz="1700" b="1">
+                <a:solidFill>
+                  <a:srgbClr val="222222"/>
+                </a:solidFill>
+                <a:latin typeface="맑은 고딕"/>
+              </a:rPr>
+              <a:t>다중화</a:t>
+            </a:r>
+            <a:r>
+              <a:rPr sz="1700" b="0">
+                <a:solidFill>
+                  <a:srgbClr val="222222"/>
+                </a:solidFill>
+                <a:latin typeface="맑은 고딕"/>
+              </a:rPr>
+              <a:t>. 실무에서는 서로 다른 디스크에</a:t>
             </a:r>
           </a:p>
         </p:txBody>
@@ -14292,9 +17016,19 @@
                 <a:solidFill>
                   <a:srgbClr val="FFFFFF"/>
                 </a:solidFill>
-                <a:latin typeface="맑은 고딕"/>
-              </a:rPr>
-              <a:t>`_DGMGRL` 정적 등록</a:t>
+                <a:latin typeface="Consolas"/>
+                <a:cs typeface="Consolas"/>
+              </a:rPr>
+              <a:t>_DGMGRL</a:t>
+            </a:r>
+            <a:r>
+              <a:rPr sz="2600" b="1">
+                <a:solidFill>
+                  <a:srgbClr val="FFFFFF"/>
+                </a:solidFill>
+                <a:latin typeface="맑은 고딕"/>
+              </a:rPr>
+              <a:t> 정적 등록</a:t>
             </a:r>
           </a:p>
         </p:txBody>
@@ -14372,7 +17106,45 @@
                 </a:solidFill>
                 <a:latin typeface="맑은 고딕"/>
               </a:rPr>
-              <a:t>•  `GLOBAL_DBNAME = chicago_DGMGRL` 을 `listener.ora` 에</a:t>
+              <a:t>•  </a:t>
+            </a:r>
+            <a:r>
+              <a:rPr sz="1700" b="0">
+                <a:solidFill>
+                  <a:srgbClr val="222222"/>
+                </a:solidFill>
+                <a:latin typeface="Consolas"/>
+                <a:cs typeface="Consolas"/>
+              </a:rPr>
+              <a:t>GLOBAL_DBNAME = chicago_DGMGRL</a:t>
+            </a:r>
+            <a:r>
+              <a:rPr sz="1700" b="0">
+                <a:solidFill>
+                  <a:srgbClr val="222222"/>
+                </a:solidFill>
+                <a:latin typeface="맑은 고딕"/>
+              </a:rPr>
+              <a:t> 을 </a:t>
+            </a:r>
+            <a:r>
+              <a:rPr sz="1700" b="0">
+                <a:solidFill>
+                  <a:srgbClr val="222222"/>
+                </a:solidFill>
+                <a:latin typeface="Consolas"/>
+                <a:cs typeface="Consolas"/>
+              </a:rPr>
+              <a:t>listener.ora</a:t>
+            </a:r>
+            <a:r>
+              <a:rPr sz="1700" b="0">
+                <a:solidFill>
+                  <a:srgbClr val="222222"/>
+                </a:solidFill>
+                <a:latin typeface="맑은 고딕"/>
+              </a:rPr>
+              <a:t> 에</a:t>
             </a:r>
           </a:p>
           <a:p>
@@ -14388,7 +17160,45 @@
                 </a:solidFill>
                 <a:latin typeface="맑은 고딕"/>
               </a:rPr>
-              <a:t>•  `lsnrctl status` 에 **`status UNKNOWN`** 으로 보인다</a:t>
+              <a:t>•  </a:t>
+            </a:r>
+            <a:r>
+              <a:rPr sz="1700" b="0">
+                <a:solidFill>
+                  <a:srgbClr val="222222"/>
+                </a:solidFill>
+                <a:latin typeface="Consolas"/>
+                <a:cs typeface="Consolas"/>
+              </a:rPr>
+              <a:t>lsnrctl status</a:t>
+            </a:r>
+            <a:r>
+              <a:rPr sz="1700" b="0">
+                <a:solidFill>
+                  <a:srgbClr val="222222"/>
+                </a:solidFill>
+                <a:latin typeface="맑은 고딕"/>
+              </a:rPr>
+              <a:t> 에 </a:t>
+            </a:r>
+            <a:r>
+              <a:rPr sz="1700" b="1">
+                <a:solidFill>
+                  <a:srgbClr val="222222"/>
+                </a:solidFill>
+                <a:latin typeface="Consolas"/>
+                <a:cs typeface="Consolas"/>
+              </a:rPr>
+              <a:t>status UNKNOWN</a:t>
+            </a:r>
+            <a:r>
+              <a:rPr sz="1700" b="0">
+                <a:solidFill>
+                  <a:srgbClr val="222222"/>
+                </a:solidFill>
+                <a:latin typeface="맑은 고딕"/>
+              </a:rPr>
+              <a:t> 으로 보인다</a:t>
             </a:r>
           </a:p>
           <a:p>
@@ -14404,7 +17214,16 @@
                 </a:solidFill>
                 <a:latin typeface="맑은 고딕"/>
               </a:rPr>
-              <a:t>•  이유 — 역할 전환 중 **재기동 구간에는 동적 등록이 없다**</a:t>
+              <a:t>•  이유 — 역할 전환 중 </a:t>
+            </a:r>
+            <a:r>
+              <a:rPr sz="1700" b="1">
+                <a:solidFill>
+                  <a:srgbClr val="222222"/>
+                </a:solidFill>
+                <a:latin typeface="맑은 고딕"/>
+              </a:rPr>
+              <a:t>재기동 구간에는 동적 등록이 없다</a:t>
             </a:r>
           </a:p>
           <a:p>
@@ -14420,7 +17239,26 @@
                 </a:solidFill>
                 <a:latin typeface="맑은 고딕"/>
               </a:rPr>
-              <a:t>•  실제 사용처 — `StaticConnectIdentifier` 속성에 그대로 들어 있다</a:t>
+              <a:t>•  실제 사용처 — </a:t>
+            </a:r>
+            <a:r>
+              <a:rPr sz="1700" b="0">
+                <a:solidFill>
+                  <a:srgbClr val="222222"/>
+                </a:solidFill>
+                <a:latin typeface="Consolas"/>
+                <a:cs typeface="Consolas"/>
+              </a:rPr>
+              <a:t>StaticConnectIdentifier</a:t>
+            </a:r>
+            <a:r>
+              <a:rPr sz="1700" b="0">
+                <a:solidFill>
+                  <a:srgbClr val="222222"/>
+                </a:solidFill>
+                <a:latin typeface="맑은 고딕"/>
+              </a:rPr>
+              <a:t> 속성에 그대로 들어 있다</a:t>
             </a:r>
           </a:p>
         </p:txBody>
